--- a/figures/fig3/fig3.pptx
+++ b/figures/fig3/fig3.pptx
@@ -10,7 +10,7 @@
   <p:sldIdLst>
     <p:sldId id="256" r:id="rId2"/>
   </p:sldIdLst>
-  <p:sldSz cx="5940425" cy="8135938"/>
+  <p:sldSz cx="7272338" cy="8135938"/>
   <p:notesSz cx="6858000" cy="9144000"/>
   <p:defaultTextStyle>
     <a:defPPr>
@@ -110,12 +110,12 @@
   <p:extLst>
     <p:ext uri="{EFAFB233-063F-42B5-8137-9DF3F51BA10A}">
       <p15:sldGuideLst xmlns:p15="http://schemas.microsoft.com/office/powerpoint/2012/main">
-        <p15:guide id="1" orient="horz" pos="2160">
+        <p15:guide id="1" orient="horz" pos="2160" userDrawn="1">
           <p15:clr>
             <a:srgbClr val="A4A3A4"/>
           </p15:clr>
         </p15:guide>
-        <p15:guide id="2" pos="2880">
+        <p15:guide id="2" pos="3526" userDrawn="1">
           <p15:clr>
             <a:srgbClr val="A4A3A4"/>
           </p15:clr>
@@ -226,8 +226,8 @@
         </p:nvSpPr>
         <p:spPr>
           <a:xfrm>
-            <a:off x="2301875" y="1143000"/>
-            <a:ext cx="2254250" cy="3086100"/>
+            <a:off x="2051050" y="1143000"/>
+            <a:ext cx="2755900" cy="3086100"/>
           </a:xfrm>
           <a:prstGeom prst="rect">
             <a:avLst/>
@@ -502,7 +502,12 @@
             <p:ph type="sldImg"/>
           </p:nvPr>
         </p:nvSpPr>
-        <p:spPr/>
+        <p:spPr>
+          <a:xfrm>
+            <a:off x="2051050" y="1143000"/>
+            <a:ext cx="2755900" cy="3086100"/>
+          </a:xfrm>
+        </p:spPr>
       </p:sp>
       <p:sp>
         <p:nvSpPr>
@@ -588,8 +593,8 @@
         </p:nvSpPr>
         <p:spPr>
           <a:xfrm>
-            <a:off x="685800" y="2130425"/>
-            <a:ext cx="7772400" cy="1470025"/>
+            <a:off x="839565" y="2130426"/>
+            <a:ext cx="9515063" cy="1470025"/>
           </a:xfrm>
         </p:spPr>
         <p:txBody>
@@ -615,8 +620,8 @@
         </p:nvSpPr>
         <p:spPr>
           <a:xfrm>
-            <a:off x="1371600" y="3886200"/>
-            <a:ext cx="6400800" cy="1752600"/>
+            <a:off x="1679129" y="3886200"/>
+            <a:ext cx="7835934" cy="1752600"/>
           </a:xfrm>
         </p:spPr>
         <p:txBody>
@@ -632,7 +637,7 @@
                 </a:solidFill>
               </a:defRPr>
             </a:lvl1pPr>
-            <a:lvl2pPr marL="457200" indent="0" algn="ctr">
+            <a:lvl2pPr marL="559704" indent="0" algn="ctr">
               <a:buNone/>
               <a:defRPr>
                 <a:solidFill>
@@ -642,7 +647,7 @@
                 </a:solidFill>
               </a:defRPr>
             </a:lvl2pPr>
-            <a:lvl3pPr marL="914400" indent="0" algn="ctr">
+            <a:lvl3pPr marL="1119408" indent="0" algn="ctr">
               <a:buNone/>
               <a:defRPr>
                 <a:solidFill>
@@ -652,7 +657,7 @@
                 </a:solidFill>
               </a:defRPr>
             </a:lvl3pPr>
-            <a:lvl4pPr marL="1371600" indent="0" algn="ctr">
+            <a:lvl4pPr marL="1679113" indent="0" algn="ctr">
               <a:buNone/>
               <a:defRPr>
                 <a:solidFill>
@@ -662,7 +667,7 @@
                 </a:solidFill>
               </a:defRPr>
             </a:lvl4pPr>
-            <a:lvl5pPr marL="1828800" indent="0" algn="ctr">
+            <a:lvl5pPr marL="2238817" indent="0" algn="ctr">
               <a:buNone/>
               <a:defRPr>
                 <a:solidFill>
@@ -672,7 +677,7 @@
                 </a:solidFill>
               </a:defRPr>
             </a:lvl5pPr>
-            <a:lvl6pPr marL="2286000" indent="0" algn="ctr">
+            <a:lvl6pPr marL="2798521" indent="0" algn="ctr">
               <a:buNone/>
               <a:defRPr>
                 <a:solidFill>
@@ -682,7 +687,7 @@
                 </a:solidFill>
               </a:defRPr>
             </a:lvl6pPr>
-            <a:lvl7pPr marL="2743200" indent="0" algn="ctr">
+            <a:lvl7pPr marL="3358225" indent="0" algn="ctr">
               <a:buNone/>
               <a:defRPr>
                 <a:solidFill>
@@ -692,7 +697,7 @@
                 </a:solidFill>
               </a:defRPr>
             </a:lvl7pPr>
-            <a:lvl8pPr marL="3200400" indent="0" algn="ctr">
+            <a:lvl8pPr marL="3917930" indent="0" algn="ctr">
               <a:buNone/>
               <a:defRPr>
                 <a:solidFill>
@@ -702,7 +707,7 @@
                 </a:solidFill>
               </a:defRPr>
             </a:lvl8pPr>
-            <a:lvl9pPr marL="3657600" indent="0" algn="ctr">
+            <a:lvl9pPr marL="4477634" indent="0" algn="ctr">
               <a:buNone/>
               <a:defRPr>
                 <a:solidFill>
@@ -996,8 +1001,8 @@
         </p:nvSpPr>
         <p:spPr>
           <a:xfrm>
-            <a:off x="6629400" y="274638"/>
-            <a:ext cx="2057400" cy="5851525"/>
+            <a:off x="8115789" y="274639"/>
+            <a:ext cx="2518693" cy="5851525"/>
           </a:xfrm>
         </p:spPr>
         <p:txBody>
@@ -1023,8 +1028,8 @@
         </p:nvSpPr>
         <p:spPr>
           <a:xfrm>
-            <a:off x="457200" y="274638"/>
-            <a:ext cx="6019800" cy="5851525"/>
+            <a:off x="559710" y="274639"/>
+            <a:ext cx="7369510" cy="5851525"/>
           </a:xfrm>
         </p:spPr>
         <p:txBody>
@@ -1342,15 +1347,15 @@
         </p:nvSpPr>
         <p:spPr>
           <a:xfrm>
-            <a:off x="722313" y="4406900"/>
-            <a:ext cx="7772400" cy="1362075"/>
+            <a:off x="884264" y="4406901"/>
+            <a:ext cx="9515063" cy="1362075"/>
           </a:xfrm>
         </p:spPr>
         <p:txBody>
           <a:bodyPr anchor="t"/>
           <a:lstStyle>
             <a:lvl1pPr algn="l">
-              <a:defRPr sz="4000" b="1" cap="all"/>
+              <a:defRPr sz="4897" b="1" cap="all"/>
             </a:lvl1pPr>
           </a:lstStyle>
           <a:p>
@@ -1373,8 +1378,8 @@
         </p:nvSpPr>
         <p:spPr>
           <a:xfrm>
-            <a:off x="722313" y="2906713"/>
-            <a:ext cx="7772400" cy="1500187"/>
+            <a:off x="884264" y="2906714"/>
+            <a:ext cx="9515063" cy="1500187"/>
           </a:xfrm>
         </p:spPr>
         <p:txBody>
@@ -1382,7 +1387,7 @@
           <a:lstStyle>
             <a:lvl1pPr marL="0" indent="0">
               <a:buNone/>
-              <a:defRPr sz="2000">
+              <a:defRPr sz="2448">
                 <a:solidFill>
                   <a:schemeClr val="tx1">
                     <a:tint val="75000"/>
@@ -1390,9 +1395,9 @@
                 </a:solidFill>
               </a:defRPr>
             </a:lvl1pPr>
-            <a:lvl2pPr marL="457200" indent="0">
-              <a:buNone/>
-              <a:defRPr sz="1800">
+            <a:lvl2pPr marL="559704" indent="0">
+              <a:buNone/>
+              <a:defRPr sz="2204">
                 <a:solidFill>
                   <a:schemeClr val="tx1">
                     <a:tint val="75000"/>
@@ -1400,9 +1405,9 @@
                 </a:solidFill>
               </a:defRPr>
             </a:lvl2pPr>
-            <a:lvl3pPr marL="914400" indent="0">
-              <a:buNone/>
-              <a:defRPr sz="1600">
+            <a:lvl3pPr marL="1119408" indent="0">
+              <a:buNone/>
+              <a:defRPr sz="1959">
                 <a:solidFill>
                   <a:schemeClr val="tx1">
                     <a:tint val="75000"/>
@@ -1410,9 +1415,9 @@
                 </a:solidFill>
               </a:defRPr>
             </a:lvl3pPr>
-            <a:lvl4pPr marL="1371600" indent="0">
-              <a:buNone/>
-              <a:defRPr sz="1400">
+            <a:lvl4pPr marL="1679113" indent="0">
+              <a:buNone/>
+              <a:defRPr sz="1714">
                 <a:solidFill>
                   <a:schemeClr val="tx1">
                     <a:tint val="75000"/>
@@ -1420,9 +1425,9 @@
                 </a:solidFill>
               </a:defRPr>
             </a:lvl4pPr>
-            <a:lvl5pPr marL="1828800" indent="0">
-              <a:buNone/>
-              <a:defRPr sz="1400">
+            <a:lvl5pPr marL="2238817" indent="0">
+              <a:buNone/>
+              <a:defRPr sz="1714">
                 <a:solidFill>
                   <a:schemeClr val="tx1">
                     <a:tint val="75000"/>
@@ -1430,9 +1435,9 @@
                 </a:solidFill>
               </a:defRPr>
             </a:lvl5pPr>
-            <a:lvl6pPr marL="2286000" indent="0">
-              <a:buNone/>
-              <a:defRPr sz="1400">
+            <a:lvl6pPr marL="2798521" indent="0">
+              <a:buNone/>
+              <a:defRPr sz="1714">
                 <a:solidFill>
                   <a:schemeClr val="tx1">
                     <a:tint val="75000"/>
@@ -1440,9 +1445,9 @@
                 </a:solidFill>
               </a:defRPr>
             </a:lvl6pPr>
-            <a:lvl7pPr marL="2743200" indent="0">
-              <a:buNone/>
-              <a:defRPr sz="1400">
+            <a:lvl7pPr marL="3358225" indent="0">
+              <a:buNone/>
+              <a:defRPr sz="1714">
                 <a:solidFill>
                   <a:schemeClr val="tx1">
                     <a:tint val="75000"/>
@@ -1450,9 +1455,9 @@
                 </a:solidFill>
               </a:defRPr>
             </a:lvl7pPr>
-            <a:lvl8pPr marL="3200400" indent="0">
-              <a:buNone/>
-              <a:defRPr sz="1400">
+            <a:lvl8pPr marL="3917930" indent="0">
+              <a:buNone/>
+              <a:defRPr sz="1714">
                 <a:solidFill>
                   <a:schemeClr val="tx1">
                     <a:tint val="75000"/>
@@ -1460,9 +1465,9 @@
                 </a:solidFill>
               </a:defRPr>
             </a:lvl8pPr>
-            <a:lvl9pPr marL="3657600" indent="0">
-              <a:buNone/>
-              <a:defRPr sz="1400">
+            <a:lvl9pPr marL="4477634" indent="0">
+              <a:buNone/>
+              <a:defRPr sz="1714">
                 <a:solidFill>
                   <a:schemeClr val="tx1">
                     <a:tint val="75000"/>
@@ -1609,39 +1614,39 @@
         </p:nvSpPr>
         <p:spPr>
           <a:xfrm>
-            <a:off x="457200" y="1600200"/>
-            <a:ext cx="4038600" cy="4525963"/>
+            <a:off x="559709" y="1600201"/>
+            <a:ext cx="4944102" cy="4525963"/>
           </a:xfrm>
         </p:spPr>
         <p:txBody>
           <a:bodyPr/>
           <a:lstStyle>
             <a:lvl1pPr>
-              <a:defRPr sz="2800"/>
+              <a:defRPr sz="3428"/>
             </a:lvl1pPr>
             <a:lvl2pPr>
-              <a:defRPr sz="2400"/>
+              <a:defRPr sz="2938"/>
             </a:lvl2pPr>
             <a:lvl3pPr>
-              <a:defRPr sz="2000"/>
+              <a:defRPr sz="2448"/>
             </a:lvl3pPr>
             <a:lvl4pPr>
-              <a:defRPr sz="1800"/>
+              <a:defRPr sz="2204"/>
             </a:lvl4pPr>
             <a:lvl5pPr>
-              <a:defRPr sz="1800"/>
+              <a:defRPr sz="2204"/>
             </a:lvl5pPr>
             <a:lvl6pPr>
-              <a:defRPr sz="1800"/>
+              <a:defRPr sz="2204"/>
             </a:lvl6pPr>
             <a:lvl7pPr>
-              <a:defRPr sz="1800"/>
+              <a:defRPr sz="2204"/>
             </a:lvl7pPr>
             <a:lvl8pPr>
-              <a:defRPr sz="1800"/>
+              <a:defRPr sz="2204"/>
             </a:lvl8pPr>
             <a:lvl9pPr>
-              <a:defRPr sz="1800"/>
+              <a:defRPr sz="2204"/>
             </a:lvl9pPr>
           </a:lstStyle>
           <a:p>
@@ -1693,39 +1698,39 @@
         </p:nvSpPr>
         <p:spPr>
           <a:xfrm>
-            <a:off x="4648200" y="1600200"/>
-            <a:ext cx="4038600" cy="4525963"/>
+            <a:off x="5690381" y="1600201"/>
+            <a:ext cx="4944102" cy="4525963"/>
           </a:xfrm>
         </p:spPr>
         <p:txBody>
           <a:bodyPr/>
           <a:lstStyle>
             <a:lvl1pPr>
-              <a:defRPr sz="2800"/>
+              <a:defRPr sz="3428"/>
             </a:lvl1pPr>
             <a:lvl2pPr>
-              <a:defRPr sz="2400"/>
+              <a:defRPr sz="2938"/>
             </a:lvl2pPr>
             <a:lvl3pPr>
-              <a:defRPr sz="2000"/>
+              <a:defRPr sz="2448"/>
             </a:lvl3pPr>
             <a:lvl4pPr>
-              <a:defRPr sz="1800"/>
+              <a:defRPr sz="2204"/>
             </a:lvl4pPr>
             <a:lvl5pPr>
-              <a:defRPr sz="1800"/>
+              <a:defRPr sz="2204"/>
             </a:lvl5pPr>
             <a:lvl6pPr>
-              <a:defRPr sz="1800"/>
+              <a:defRPr sz="2204"/>
             </a:lvl6pPr>
             <a:lvl7pPr>
-              <a:defRPr sz="1800"/>
+              <a:defRPr sz="2204"/>
             </a:lvl7pPr>
             <a:lvl8pPr>
-              <a:defRPr sz="1800"/>
+              <a:defRPr sz="2204"/>
             </a:lvl8pPr>
             <a:lvl9pPr>
-              <a:defRPr sz="1800"/>
+              <a:defRPr sz="2204"/>
             </a:lvl9pPr>
           </a:lstStyle>
           <a:p>
@@ -1898,8 +1903,8 @@
         </p:nvSpPr>
         <p:spPr>
           <a:xfrm>
-            <a:off x="457200" y="1535113"/>
-            <a:ext cx="4040188" cy="639762"/>
+            <a:off x="559709" y="1535113"/>
+            <a:ext cx="4946046" cy="639762"/>
           </a:xfrm>
         </p:spPr>
         <p:txBody>
@@ -1907,39 +1912,39 @@
           <a:lstStyle>
             <a:lvl1pPr marL="0" indent="0">
               <a:buNone/>
-              <a:defRPr sz="2400" b="1"/>
+              <a:defRPr sz="2938" b="1"/>
             </a:lvl1pPr>
-            <a:lvl2pPr marL="457200" indent="0">
-              <a:buNone/>
-              <a:defRPr sz="2000" b="1"/>
+            <a:lvl2pPr marL="559704" indent="0">
+              <a:buNone/>
+              <a:defRPr sz="2448" b="1"/>
             </a:lvl2pPr>
-            <a:lvl3pPr marL="914400" indent="0">
-              <a:buNone/>
-              <a:defRPr sz="1800" b="1"/>
+            <a:lvl3pPr marL="1119408" indent="0">
+              <a:buNone/>
+              <a:defRPr sz="2204" b="1"/>
             </a:lvl3pPr>
-            <a:lvl4pPr marL="1371600" indent="0">
-              <a:buNone/>
-              <a:defRPr sz="1600" b="1"/>
+            <a:lvl4pPr marL="1679113" indent="0">
+              <a:buNone/>
+              <a:defRPr sz="1959" b="1"/>
             </a:lvl4pPr>
-            <a:lvl5pPr marL="1828800" indent="0">
-              <a:buNone/>
-              <a:defRPr sz="1600" b="1"/>
+            <a:lvl5pPr marL="2238817" indent="0">
+              <a:buNone/>
+              <a:defRPr sz="1959" b="1"/>
             </a:lvl5pPr>
-            <a:lvl6pPr marL="2286000" indent="0">
-              <a:buNone/>
-              <a:defRPr sz="1600" b="1"/>
+            <a:lvl6pPr marL="2798521" indent="0">
+              <a:buNone/>
+              <a:defRPr sz="1959" b="1"/>
             </a:lvl6pPr>
-            <a:lvl7pPr marL="2743200" indent="0">
-              <a:buNone/>
-              <a:defRPr sz="1600" b="1"/>
+            <a:lvl7pPr marL="3358225" indent="0">
+              <a:buNone/>
+              <a:defRPr sz="1959" b="1"/>
             </a:lvl7pPr>
-            <a:lvl8pPr marL="3200400" indent="0">
-              <a:buNone/>
-              <a:defRPr sz="1600" b="1"/>
+            <a:lvl8pPr marL="3917930" indent="0">
+              <a:buNone/>
+              <a:defRPr sz="1959" b="1"/>
             </a:lvl8pPr>
-            <a:lvl9pPr marL="3657600" indent="0">
-              <a:buNone/>
-              <a:defRPr sz="1600" b="1"/>
+            <a:lvl9pPr marL="4477634" indent="0">
+              <a:buNone/>
+              <a:defRPr sz="1959" b="1"/>
             </a:lvl9pPr>
           </a:lstStyle>
           <a:p>
@@ -1963,39 +1968,39 @@
         </p:nvSpPr>
         <p:spPr>
           <a:xfrm>
-            <a:off x="457200" y="2174875"/>
-            <a:ext cx="4040188" cy="3951288"/>
+            <a:off x="559709" y="2174875"/>
+            <a:ext cx="4946046" cy="3951288"/>
           </a:xfrm>
         </p:spPr>
         <p:txBody>
           <a:bodyPr/>
           <a:lstStyle>
             <a:lvl1pPr>
-              <a:defRPr sz="2400"/>
+              <a:defRPr sz="2938"/>
             </a:lvl1pPr>
             <a:lvl2pPr>
-              <a:defRPr sz="2000"/>
+              <a:defRPr sz="2448"/>
             </a:lvl2pPr>
             <a:lvl3pPr>
-              <a:defRPr sz="1800"/>
+              <a:defRPr sz="2204"/>
             </a:lvl3pPr>
             <a:lvl4pPr>
-              <a:defRPr sz="1600"/>
+              <a:defRPr sz="1959"/>
             </a:lvl4pPr>
             <a:lvl5pPr>
-              <a:defRPr sz="1600"/>
+              <a:defRPr sz="1959"/>
             </a:lvl5pPr>
             <a:lvl6pPr>
-              <a:defRPr sz="1600"/>
+              <a:defRPr sz="1959"/>
             </a:lvl6pPr>
             <a:lvl7pPr>
-              <a:defRPr sz="1600"/>
+              <a:defRPr sz="1959"/>
             </a:lvl7pPr>
             <a:lvl8pPr>
-              <a:defRPr sz="1600"/>
+              <a:defRPr sz="1959"/>
             </a:lvl8pPr>
             <a:lvl9pPr>
-              <a:defRPr sz="1600"/>
+              <a:defRPr sz="1959"/>
             </a:lvl9pPr>
           </a:lstStyle>
           <a:p>
@@ -2047,8 +2052,8 @@
         </p:nvSpPr>
         <p:spPr>
           <a:xfrm>
-            <a:off x="4645025" y="1535113"/>
-            <a:ext cx="4041775" cy="639762"/>
+            <a:off x="5686495" y="1535113"/>
+            <a:ext cx="4947988" cy="639762"/>
           </a:xfrm>
         </p:spPr>
         <p:txBody>
@@ -2056,39 +2061,39 @@
           <a:lstStyle>
             <a:lvl1pPr marL="0" indent="0">
               <a:buNone/>
-              <a:defRPr sz="2400" b="1"/>
+              <a:defRPr sz="2938" b="1"/>
             </a:lvl1pPr>
-            <a:lvl2pPr marL="457200" indent="0">
-              <a:buNone/>
-              <a:defRPr sz="2000" b="1"/>
+            <a:lvl2pPr marL="559704" indent="0">
+              <a:buNone/>
+              <a:defRPr sz="2448" b="1"/>
             </a:lvl2pPr>
-            <a:lvl3pPr marL="914400" indent="0">
-              <a:buNone/>
-              <a:defRPr sz="1800" b="1"/>
+            <a:lvl3pPr marL="1119408" indent="0">
+              <a:buNone/>
+              <a:defRPr sz="2204" b="1"/>
             </a:lvl3pPr>
-            <a:lvl4pPr marL="1371600" indent="0">
-              <a:buNone/>
-              <a:defRPr sz="1600" b="1"/>
+            <a:lvl4pPr marL="1679113" indent="0">
+              <a:buNone/>
+              <a:defRPr sz="1959" b="1"/>
             </a:lvl4pPr>
-            <a:lvl5pPr marL="1828800" indent="0">
-              <a:buNone/>
-              <a:defRPr sz="1600" b="1"/>
+            <a:lvl5pPr marL="2238817" indent="0">
+              <a:buNone/>
+              <a:defRPr sz="1959" b="1"/>
             </a:lvl5pPr>
-            <a:lvl6pPr marL="2286000" indent="0">
-              <a:buNone/>
-              <a:defRPr sz="1600" b="1"/>
+            <a:lvl6pPr marL="2798521" indent="0">
+              <a:buNone/>
+              <a:defRPr sz="1959" b="1"/>
             </a:lvl6pPr>
-            <a:lvl7pPr marL="2743200" indent="0">
-              <a:buNone/>
-              <a:defRPr sz="1600" b="1"/>
+            <a:lvl7pPr marL="3358225" indent="0">
+              <a:buNone/>
+              <a:defRPr sz="1959" b="1"/>
             </a:lvl7pPr>
-            <a:lvl8pPr marL="3200400" indent="0">
-              <a:buNone/>
-              <a:defRPr sz="1600" b="1"/>
+            <a:lvl8pPr marL="3917930" indent="0">
+              <a:buNone/>
+              <a:defRPr sz="1959" b="1"/>
             </a:lvl8pPr>
-            <a:lvl9pPr marL="3657600" indent="0">
-              <a:buNone/>
-              <a:defRPr sz="1600" b="1"/>
+            <a:lvl9pPr marL="4477634" indent="0">
+              <a:buNone/>
+              <a:defRPr sz="1959" b="1"/>
             </a:lvl9pPr>
           </a:lstStyle>
           <a:p>
@@ -2112,39 +2117,39 @@
         </p:nvSpPr>
         <p:spPr>
           <a:xfrm>
-            <a:off x="4645025" y="2174875"/>
-            <a:ext cx="4041775" cy="3951288"/>
+            <a:off x="5686495" y="2174875"/>
+            <a:ext cx="4947988" cy="3951288"/>
           </a:xfrm>
         </p:spPr>
         <p:txBody>
           <a:bodyPr/>
           <a:lstStyle>
             <a:lvl1pPr>
-              <a:defRPr sz="2400"/>
+              <a:defRPr sz="2938"/>
             </a:lvl1pPr>
             <a:lvl2pPr>
-              <a:defRPr sz="2000"/>
+              <a:defRPr sz="2448"/>
             </a:lvl2pPr>
             <a:lvl3pPr>
-              <a:defRPr sz="1800"/>
+              <a:defRPr sz="2204"/>
             </a:lvl3pPr>
             <a:lvl4pPr>
-              <a:defRPr sz="1600"/>
+              <a:defRPr sz="1959"/>
             </a:lvl4pPr>
             <a:lvl5pPr>
-              <a:defRPr sz="1600"/>
+              <a:defRPr sz="1959"/>
             </a:lvl5pPr>
             <a:lvl6pPr>
-              <a:defRPr sz="1600"/>
+              <a:defRPr sz="1959"/>
             </a:lvl6pPr>
             <a:lvl7pPr>
-              <a:defRPr sz="1600"/>
+              <a:defRPr sz="1959"/>
             </a:lvl7pPr>
             <a:lvl8pPr>
-              <a:defRPr sz="1600"/>
+              <a:defRPr sz="1959"/>
             </a:lvl8pPr>
             <a:lvl9pPr>
-              <a:defRPr sz="1600"/>
+              <a:defRPr sz="1959"/>
             </a:lvl9pPr>
           </a:lstStyle>
           <a:p>
@@ -2503,15 +2508,15 @@
         </p:nvSpPr>
         <p:spPr>
           <a:xfrm>
-            <a:off x="457200" y="273050"/>
-            <a:ext cx="3008313" cy="1162050"/>
+            <a:off x="559710" y="273050"/>
+            <a:ext cx="3682812" cy="1162050"/>
           </a:xfrm>
         </p:spPr>
         <p:txBody>
           <a:bodyPr anchor="b"/>
           <a:lstStyle>
             <a:lvl1pPr algn="l">
-              <a:defRPr sz="2000" b="1"/>
+              <a:defRPr sz="2448" b="1"/>
             </a:lvl1pPr>
           </a:lstStyle>
           <a:p>
@@ -2534,39 +2539,39 @@
         </p:nvSpPr>
         <p:spPr>
           <a:xfrm>
-            <a:off x="3575050" y="273050"/>
-            <a:ext cx="5111750" cy="5853113"/>
+            <a:off x="4376618" y="273051"/>
+            <a:ext cx="6257864" cy="5853113"/>
           </a:xfrm>
         </p:spPr>
         <p:txBody>
           <a:bodyPr/>
           <a:lstStyle>
             <a:lvl1pPr>
-              <a:defRPr sz="3200"/>
+              <a:defRPr sz="3917"/>
             </a:lvl1pPr>
             <a:lvl2pPr>
-              <a:defRPr sz="2800"/>
+              <a:defRPr sz="3428"/>
             </a:lvl2pPr>
             <a:lvl3pPr>
-              <a:defRPr sz="2400"/>
+              <a:defRPr sz="2938"/>
             </a:lvl3pPr>
             <a:lvl4pPr>
-              <a:defRPr sz="2000"/>
+              <a:defRPr sz="2448"/>
             </a:lvl4pPr>
             <a:lvl5pPr>
-              <a:defRPr sz="2000"/>
+              <a:defRPr sz="2448"/>
             </a:lvl5pPr>
             <a:lvl6pPr>
-              <a:defRPr sz="2000"/>
+              <a:defRPr sz="2448"/>
             </a:lvl6pPr>
             <a:lvl7pPr>
-              <a:defRPr sz="2000"/>
+              <a:defRPr sz="2448"/>
             </a:lvl7pPr>
             <a:lvl8pPr>
-              <a:defRPr sz="2000"/>
+              <a:defRPr sz="2448"/>
             </a:lvl8pPr>
             <a:lvl9pPr>
-              <a:defRPr sz="2000"/>
+              <a:defRPr sz="2448"/>
             </a:lvl9pPr>
           </a:lstStyle>
           <a:p>
@@ -2618,8 +2623,8 @@
         </p:nvSpPr>
         <p:spPr>
           <a:xfrm>
-            <a:off x="457200" y="1435100"/>
-            <a:ext cx="3008313" cy="4691063"/>
+            <a:off x="559710" y="1435101"/>
+            <a:ext cx="3682812" cy="4691063"/>
           </a:xfrm>
         </p:spPr>
         <p:txBody>
@@ -2627,39 +2632,39 @@
           <a:lstStyle>
             <a:lvl1pPr marL="0" indent="0">
               <a:buNone/>
-              <a:defRPr sz="1400"/>
+              <a:defRPr sz="1714"/>
             </a:lvl1pPr>
-            <a:lvl2pPr marL="457200" indent="0">
-              <a:buNone/>
-              <a:defRPr sz="1200"/>
+            <a:lvl2pPr marL="559704" indent="0">
+              <a:buNone/>
+              <a:defRPr sz="1469"/>
             </a:lvl2pPr>
-            <a:lvl3pPr marL="914400" indent="0">
-              <a:buNone/>
-              <a:defRPr sz="1000"/>
+            <a:lvl3pPr marL="1119408" indent="0">
+              <a:buNone/>
+              <a:defRPr sz="1224"/>
             </a:lvl3pPr>
-            <a:lvl4pPr marL="1371600" indent="0">
-              <a:buNone/>
-              <a:defRPr sz="900"/>
+            <a:lvl4pPr marL="1679113" indent="0">
+              <a:buNone/>
+              <a:defRPr sz="1102"/>
             </a:lvl4pPr>
-            <a:lvl5pPr marL="1828800" indent="0">
-              <a:buNone/>
-              <a:defRPr sz="900"/>
+            <a:lvl5pPr marL="2238817" indent="0">
+              <a:buNone/>
+              <a:defRPr sz="1102"/>
             </a:lvl5pPr>
-            <a:lvl6pPr marL="2286000" indent="0">
-              <a:buNone/>
-              <a:defRPr sz="900"/>
+            <a:lvl6pPr marL="2798521" indent="0">
+              <a:buNone/>
+              <a:defRPr sz="1102"/>
             </a:lvl6pPr>
-            <a:lvl7pPr marL="2743200" indent="0">
-              <a:buNone/>
-              <a:defRPr sz="900"/>
+            <a:lvl7pPr marL="3358225" indent="0">
+              <a:buNone/>
+              <a:defRPr sz="1102"/>
             </a:lvl7pPr>
-            <a:lvl8pPr marL="3200400" indent="0">
-              <a:buNone/>
-              <a:defRPr sz="900"/>
+            <a:lvl8pPr marL="3917930" indent="0">
+              <a:buNone/>
+              <a:defRPr sz="1102"/>
             </a:lvl8pPr>
-            <a:lvl9pPr marL="3657600" indent="0">
-              <a:buNone/>
-              <a:defRPr sz="900"/>
+            <a:lvl9pPr marL="4477634" indent="0">
+              <a:buNone/>
+              <a:defRPr sz="1102"/>
             </a:lvl9pPr>
           </a:lstStyle>
           <a:p>
@@ -2778,15 +2783,15 @@
         </p:nvSpPr>
         <p:spPr>
           <a:xfrm>
-            <a:off x="1792288" y="4800600"/>
-            <a:ext cx="5486400" cy="566738"/>
+            <a:off x="2194140" y="4800600"/>
+            <a:ext cx="6716515" cy="566738"/>
           </a:xfrm>
         </p:spPr>
         <p:txBody>
           <a:bodyPr anchor="b"/>
           <a:lstStyle>
             <a:lvl1pPr algn="l">
-              <a:defRPr sz="2000" b="1"/>
+              <a:defRPr sz="2448" b="1"/>
             </a:lvl1pPr>
           </a:lstStyle>
           <a:p>
@@ -2809,8 +2814,8 @@
         </p:nvSpPr>
         <p:spPr>
           <a:xfrm>
-            <a:off x="1792288" y="612775"/>
-            <a:ext cx="5486400" cy="4114800"/>
+            <a:off x="2194140" y="612775"/>
+            <a:ext cx="6716515" cy="4114800"/>
           </a:xfrm>
         </p:spPr>
         <p:txBody>
@@ -2818,39 +2823,39 @@
           <a:lstStyle>
             <a:lvl1pPr marL="0" indent="0">
               <a:buNone/>
-              <a:defRPr sz="3200"/>
+              <a:defRPr sz="3917"/>
             </a:lvl1pPr>
-            <a:lvl2pPr marL="457200" indent="0">
-              <a:buNone/>
-              <a:defRPr sz="2800"/>
+            <a:lvl2pPr marL="559704" indent="0">
+              <a:buNone/>
+              <a:defRPr sz="3428"/>
             </a:lvl2pPr>
-            <a:lvl3pPr marL="914400" indent="0">
-              <a:buNone/>
-              <a:defRPr sz="2400"/>
+            <a:lvl3pPr marL="1119408" indent="0">
+              <a:buNone/>
+              <a:defRPr sz="2938"/>
             </a:lvl3pPr>
-            <a:lvl4pPr marL="1371600" indent="0">
-              <a:buNone/>
-              <a:defRPr sz="2000"/>
+            <a:lvl4pPr marL="1679113" indent="0">
+              <a:buNone/>
+              <a:defRPr sz="2448"/>
             </a:lvl4pPr>
-            <a:lvl5pPr marL="1828800" indent="0">
-              <a:buNone/>
-              <a:defRPr sz="2000"/>
+            <a:lvl5pPr marL="2238817" indent="0">
+              <a:buNone/>
+              <a:defRPr sz="2448"/>
             </a:lvl5pPr>
-            <a:lvl6pPr marL="2286000" indent="0">
-              <a:buNone/>
-              <a:defRPr sz="2000"/>
+            <a:lvl6pPr marL="2798521" indent="0">
+              <a:buNone/>
+              <a:defRPr sz="2448"/>
             </a:lvl6pPr>
-            <a:lvl7pPr marL="2743200" indent="0">
-              <a:buNone/>
-              <a:defRPr sz="2000"/>
+            <a:lvl7pPr marL="3358225" indent="0">
+              <a:buNone/>
+              <a:defRPr sz="2448"/>
             </a:lvl7pPr>
-            <a:lvl8pPr marL="3200400" indent="0">
-              <a:buNone/>
-              <a:defRPr sz="2000"/>
+            <a:lvl8pPr marL="3917930" indent="0">
+              <a:buNone/>
+              <a:defRPr sz="2448"/>
             </a:lvl8pPr>
-            <a:lvl9pPr marL="3657600" indent="0">
-              <a:buNone/>
-              <a:defRPr sz="2000"/>
+            <a:lvl9pPr marL="4477634" indent="0">
+              <a:buNone/>
+              <a:defRPr sz="2448"/>
             </a:lvl9pPr>
           </a:lstStyle>
           <a:p>
@@ -2870,8 +2875,8 @@
         </p:nvSpPr>
         <p:spPr>
           <a:xfrm>
-            <a:off x="1792288" y="5367338"/>
-            <a:ext cx="5486400" cy="804862"/>
+            <a:off x="2194140" y="5367338"/>
+            <a:ext cx="6716515" cy="804862"/>
           </a:xfrm>
         </p:spPr>
         <p:txBody>
@@ -2879,39 +2884,39 @@
           <a:lstStyle>
             <a:lvl1pPr marL="0" indent="0">
               <a:buNone/>
-              <a:defRPr sz="1400"/>
+              <a:defRPr sz="1714"/>
             </a:lvl1pPr>
-            <a:lvl2pPr marL="457200" indent="0">
-              <a:buNone/>
-              <a:defRPr sz="1200"/>
+            <a:lvl2pPr marL="559704" indent="0">
+              <a:buNone/>
+              <a:defRPr sz="1469"/>
             </a:lvl2pPr>
-            <a:lvl3pPr marL="914400" indent="0">
-              <a:buNone/>
-              <a:defRPr sz="1000"/>
+            <a:lvl3pPr marL="1119408" indent="0">
+              <a:buNone/>
+              <a:defRPr sz="1224"/>
             </a:lvl3pPr>
-            <a:lvl4pPr marL="1371600" indent="0">
-              <a:buNone/>
-              <a:defRPr sz="900"/>
+            <a:lvl4pPr marL="1679113" indent="0">
+              <a:buNone/>
+              <a:defRPr sz="1102"/>
             </a:lvl4pPr>
-            <a:lvl5pPr marL="1828800" indent="0">
-              <a:buNone/>
-              <a:defRPr sz="900"/>
+            <a:lvl5pPr marL="2238817" indent="0">
+              <a:buNone/>
+              <a:defRPr sz="1102"/>
             </a:lvl5pPr>
-            <a:lvl6pPr marL="2286000" indent="0">
-              <a:buNone/>
-              <a:defRPr sz="900"/>
+            <a:lvl6pPr marL="2798521" indent="0">
+              <a:buNone/>
+              <a:defRPr sz="1102"/>
             </a:lvl6pPr>
-            <a:lvl7pPr marL="2743200" indent="0">
-              <a:buNone/>
-              <a:defRPr sz="900"/>
+            <a:lvl7pPr marL="3358225" indent="0">
+              <a:buNone/>
+              <a:defRPr sz="1102"/>
             </a:lvl7pPr>
-            <a:lvl8pPr marL="3200400" indent="0">
-              <a:buNone/>
-              <a:defRPr sz="900"/>
+            <a:lvl8pPr marL="3917930" indent="0">
+              <a:buNone/>
+              <a:defRPr sz="1102"/>
             </a:lvl8pPr>
-            <a:lvl9pPr marL="3657600" indent="0">
-              <a:buNone/>
-              <a:defRPr sz="900"/>
+            <a:lvl9pPr marL="4477634" indent="0">
+              <a:buNone/>
+              <a:defRPr sz="1102"/>
             </a:lvl9pPr>
           </a:lstStyle>
           <a:p>
@@ -3035,8 +3040,8 @@
         </p:nvSpPr>
         <p:spPr>
           <a:xfrm>
-            <a:off x="457200" y="274638"/>
-            <a:ext cx="8229600" cy="1143000"/>
+            <a:off x="559710" y="274638"/>
+            <a:ext cx="10074773" cy="1143000"/>
           </a:xfrm>
           <a:prstGeom prst="rect">
             <a:avLst/>
@@ -3067,8 +3072,8 @@
         </p:nvSpPr>
         <p:spPr>
           <a:xfrm>
-            <a:off x="457200" y="1600200"/>
-            <a:ext cx="8229600" cy="4525963"/>
+            <a:off x="559710" y="1600201"/>
+            <a:ext cx="10074773" cy="4525963"/>
           </a:xfrm>
           <a:prstGeom prst="rect">
             <a:avLst/>
@@ -3128,8 +3133,8 @@
         </p:nvSpPr>
         <p:spPr>
           <a:xfrm>
-            <a:off x="457200" y="6356350"/>
-            <a:ext cx="2133600" cy="365125"/>
+            <a:off x="559710" y="6356351"/>
+            <a:ext cx="2611978" cy="365125"/>
           </a:xfrm>
           <a:prstGeom prst="rect">
             <a:avLst/>
@@ -3139,7 +3144,7 @@
           <a:bodyPr vert="horz" lIns="91440" tIns="45720" rIns="91440" bIns="45720" rtlCol="0" anchor="ctr"/>
           <a:lstStyle>
             <a:lvl1pPr algn="l">
-              <a:defRPr sz="1200">
+              <a:defRPr sz="1469">
                 <a:solidFill>
                   <a:schemeClr val="tx1">
                     <a:tint val="75000"/>
@@ -3169,8 +3174,8 @@
         </p:nvSpPr>
         <p:spPr>
           <a:xfrm>
-            <a:off x="3124200" y="6356350"/>
-            <a:ext cx="2895600" cy="365125"/>
+            <a:off x="3824682" y="6356351"/>
+            <a:ext cx="3544828" cy="365125"/>
           </a:xfrm>
           <a:prstGeom prst="rect">
             <a:avLst/>
@@ -3180,7 +3185,7 @@
           <a:bodyPr vert="horz" lIns="91440" tIns="45720" rIns="91440" bIns="45720" rtlCol="0" anchor="ctr"/>
           <a:lstStyle>
             <a:lvl1pPr algn="ctr">
-              <a:defRPr sz="1200">
+              <a:defRPr sz="1469">
                 <a:solidFill>
                   <a:schemeClr val="tx1">
                     <a:tint val="75000"/>
@@ -3206,8 +3211,8 @@
         </p:nvSpPr>
         <p:spPr>
           <a:xfrm>
-            <a:off x="6553200" y="6356350"/>
-            <a:ext cx="2133600" cy="365125"/>
+            <a:off x="8022504" y="6356351"/>
+            <a:ext cx="2611978" cy="365125"/>
           </a:xfrm>
           <a:prstGeom prst="rect">
             <a:avLst/>
@@ -3217,7 +3222,7 @@
           <a:bodyPr vert="horz" lIns="91440" tIns="45720" rIns="91440" bIns="45720" rtlCol="0" anchor="ctr"/>
           <a:lstStyle>
             <a:lvl1pPr algn="r">
-              <a:defRPr sz="1200">
+              <a:defRPr sz="1469">
                 <a:solidFill>
                   <a:schemeClr val="tx1">
                     <a:tint val="75000"/>
@@ -3258,12 +3263,12 @@
   </p:sldLayoutIdLst>
   <p:txStyles>
     <p:titleStyle>
-      <a:lvl1pPr algn="ctr" defTabSz="457200" rtl="0" eaLnBrk="1" latinLnBrk="0" hangingPunct="1">
+      <a:lvl1pPr algn="ctr" defTabSz="559704" rtl="0" eaLnBrk="1" latinLnBrk="0" hangingPunct="1">
         <a:spcBef>
           <a:spcPct val="0"/>
         </a:spcBef>
         <a:buNone/>
-        <a:defRPr sz="4400" kern="1200">
+        <a:defRPr sz="5386" kern="1200">
           <a:solidFill>
             <a:schemeClr val="tx1"/>
           </a:solidFill>
@@ -3274,13 +3279,13 @@
       </a:lvl1pPr>
     </p:titleStyle>
     <p:bodyStyle>
-      <a:lvl1pPr marL="342900" indent="-342900" algn="l" defTabSz="457200" rtl="0" eaLnBrk="1" latinLnBrk="0" hangingPunct="1">
+      <a:lvl1pPr marL="419778" indent="-419778" algn="l" defTabSz="559704" rtl="0" eaLnBrk="1" latinLnBrk="0" hangingPunct="1">
         <a:spcBef>
           <a:spcPct val="20000"/>
         </a:spcBef>
         <a:buFont typeface="Arial"/>
         <a:buChar char="•"/>
-        <a:defRPr sz="3200" kern="1200">
+        <a:defRPr sz="3917" kern="1200">
           <a:solidFill>
             <a:schemeClr val="tx1"/>
           </a:solidFill>
@@ -3289,13 +3294,13 @@
           <a:cs typeface="+mn-cs"/>
         </a:defRPr>
       </a:lvl1pPr>
-      <a:lvl2pPr marL="742950" indent="-285750" algn="l" defTabSz="457200" rtl="0" eaLnBrk="1" latinLnBrk="0" hangingPunct="1">
+      <a:lvl2pPr marL="909519" indent="-349815" algn="l" defTabSz="559704" rtl="0" eaLnBrk="1" latinLnBrk="0" hangingPunct="1">
         <a:spcBef>
           <a:spcPct val="20000"/>
         </a:spcBef>
         <a:buFont typeface="Arial"/>
         <a:buChar char="–"/>
-        <a:defRPr sz="2800" kern="1200">
+        <a:defRPr sz="3428" kern="1200">
           <a:solidFill>
             <a:schemeClr val="tx1"/>
           </a:solidFill>
@@ -3304,13 +3309,13 @@
           <a:cs typeface="+mn-cs"/>
         </a:defRPr>
       </a:lvl2pPr>
-      <a:lvl3pPr marL="1143000" indent="-228600" algn="l" defTabSz="457200" rtl="0" eaLnBrk="1" latinLnBrk="0" hangingPunct="1">
+      <a:lvl3pPr marL="1399261" indent="-279852" algn="l" defTabSz="559704" rtl="0" eaLnBrk="1" latinLnBrk="0" hangingPunct="1">
         <a:spcBef>
           <a:spcPct val="20000"/>
         </a:spcBef>
         <a:buFont typeface="Arial"/>
         <a:buChar char="•"/>
-        <a:defRPr sz="2400" kern="1200">
+        <a:defRPr sz="2938" kern="1200">
           <a:solidFill>
             <a:schemeClr val="tx1"/>
           </a:solidFill>
@@ -3319,13 +3324,13 @@
           <a:cs typeface="+mn-cs"/>
         </a:defRPr>
       </a:lvl3pPr>
-      <a:lvl4pPr marL="1600200" indent="-228600" algn="l" defTabSz="457200" rtl="0" eaLnBrk="1" latinLnBrk="0" hangingPunct="1">
+      <a:lvl4pPr marL="1958965" indent="-279852" algn="l" defTabSz="559704" rtl="0" eaLnBrk="1" latinLnBrk="0" hangingPunct="1">
         <a:spcBef>
           <a:spcPct val="20000"/>
         </a:spcBef>
         <a:buFont typeface="Arial"/>
         <a:buChar char="–"/>
-        <a:defRPr sz="2000" kern="1200">
+        <a:defRPr sz="2448" kern="1200">
           <a:solidFill>
             <a:schemeClr val="tx1"/>
           </a:solidFill>
@@ -3334,13 +3339,13 @@
           <a:cs typeface="+mn-cs"/>
         </a:defRPr>
       </a:lvl4pPr>
-      <a:lvl5pPr marL="2057400" indent="-228600" algn="l" defTabSz="457200" rtl="0" eaLnBrk="1" latinLnBrk="0" hangingPunct="1">
+      <a:lvl5pPr marL="2518669" indent="-279852" algn="l" defTabSz="559704" rtl="0" eaLnBrk="1" latinLnBrk="0" hangingPunct="1">
         <a:spcBef>
           <a:spcPct val="20000"/>
         </a:spcBef>
         <a:buFont typeface="Arial"/>
         <a:buChar char="»"/>
-        <a:defRPr sz="2000" kern="1200">
+        <a:defRPr sz="2448" kern="1200">
           <a:solidFill>
             <a:schemeClr val="tx1"/>
           </a:solidFill>
@@ -3349,13 +3354,13 @@
           <a:cs typeface="+mn-cs"/>
         </a:defRPr>
       </a:lvl5pPr>
-      <a:lvl6pPr marL="2514600" indent="-228600" algn="l" defTabSz="457200" rtl="0" eaLnBrk="1" latinLnBrk="0" hangingPunct="1">
+      <a:lvl6pPr marL="3078373" indent="-279852" algn="l" defTabSz="559704" rtl="0" eaLnBrk="1" latinLnBrk="0" hangingPunct="1">
         <a:spcBef>
           <a:spcPct val="20000"/>
         </a:spcBef>
         <a:buFont typeface="Arial"/>
         <a:buChar char="•"/>
-        <a:defRPr sz="2000" kern="1200">
+        <a:defRPr sz="2448" kern="1200">
           <a:solidFill>
             <a:schemeClr val="tx1"/>
           </a:solidFill>
@@ -3364,13 +3369,13 @@
           <a:cs typeface="+mn-cs"/>
         </a:defRPr>
       </a:lvl6pPr>
-      <a:lvl7pPr marL="2971800" indent="-228600" algn="l" defTabSz="457200" rtl="0" eaLnBrk="1" latinLnBrk="0" hangingPunct="1">
+      <a:lvl7pPr marL="3638078" indent="-279852" algn="l" defTabSz="559704" rtl="0" eaLnBrk="1" latinLnBrk="0" hangingPunct="1">
         <a:spcBef>
           <a:spcPct val="20000"/>
         </a:spcBef>
         <a:buFont typeface="Arial"/>
         <a:buChar char="•"/>
-        <a:defRPr sz="2000" kern="1200">
+        <a:defRPr sz="2448" kern="1200">
           <a:solidFill>
             <a:schemeClr val="tx1"/>
           </a:solidFill>
@@ -3379,13 +3384,13 @@
           <a:cs typeface="+mn-cs"/>
         </a:defRPr>
       </a:lvl7pPr>
-      <a:lvl8pPr marL="3429000" indent="-228600" algn="l" defTabSz="457200" rtl="0" eaLnBrk="1" latinLnBrk="0" hangingPunct="1">
+      <a:lvl8pPr marL="4197782" indent="-279852" algn="l" defTabSz="559704" rtl="0" eaLnBrk="1" latinLnBrk="0" hangingPunct="1">
         <a:spcBef>
           <a:spcPct val="20000"/>
         </a:spcBef>
         <a:buFont typeface="Arial"/>
         <a:buChar char="•"/>
-        <a:defRPr sz="2000" kern="1200">
+        <a:defRPr sz="2448" kern="1200">
           <a:solidFill>
             <a:schemeClr val="tx1"/>
           </a:solidFill>
@@ -3394,13 +3399,13 @@
           <a:cs typeface="+mn-cs"/>
         </a:defRPr>
       </a:lvl8pPr>
-      <a:lvl9pPr marL="3886200" indent="-228600" algn="l" defTabSz="457200" rtl="0" eaLnBrk="1" latinLnBrk="0" hangingPunct="1">
+      <a:lvl9pPr marL="4757486" indent="-279852" algn="l" defTabSz="559704" rtl="0" eaLnBrk="1" latinLnBrk="0" hangingPunct="1">
         <a:spcBef>
           <a:spcPct val="20000"/>
         </a:spcBef>
         <a:buFont typeface="Arial"/>
         <a:buChar char="•"/>
-        <a:defRPr sz="2000" kern="1200">
+        <a:defRPr sz="2448" kern="1200">
           <a:solidFill>
             <a:schemeClr val="tx1"/>
           </a:solidFill>
@@ -3414,8 +3419,8 @@
       <a:defPPr>
         <a:defRPr lang="en-US"/>
       </a:defPPr>
-      <a:lvl1pPr marL="0" algn="l" defTabSz="457200" rtl="0" eaLnBrk="1" latinLnBrk="0" hangingPunct="1">
-        <a:defRPr sz="1800" kern="1200">
+      <a:lvl1pPr marL="0" algn="l" defTabSz="559704" rtl="0" eaLnBrk="1" latinLnBrk="0" hangingPunct="1">
+        <a:defRPr sz="2204" kern="1200">
           <a:solidFill>
             <a:schemeClr val="tx1"/>
           </a:solidFill>
@@ -3424,8 +3429,8 @@
           <a:cs typeface="+mn-cs"/>
         </a:defRPr>
       </a:lvl1pPr>
-      <a:lvl2pPr marL="457200" algn="l" defTabSz="457200" rtl="0" eaLnBrk="1" latinLnBrk="0" hangingPunct="1">
-        <a:defRPr sz="1800" kern="1200">
+      <a:lvl2pPr marL="559704" algn="l" defTabSz="559704" rtl="0" eaLnBrk="1" latinLnBrk="0" hangingPunct="1">
+        <a:defRPr sz="2204" kern="1200">
           <a:solidFill>
             <a:schemeClr val="tx1"/>
           </a:solidFill>
@@ -3434,8 +3439,8 @@
           <a:cs typeface="+mn-cs"/>
         </a:defRPr>
       </a:lvl2pPr>
-      <a:lvl3pPr marL="914400" algn="l" defTabSz="457200" rtl="0" eaLnBrk="1" latinLnBrk="0" hangingPunct="1">
-        <a:defRPr sz="1800" kern="1200">
+      <a:lvl3pPr marL="1119408" algn="l" defTabSz="559704" rtl="0" eaLnBrk="1" latinLnBrk="0" hangingPunct="1">
+        <a:defRPr sz="2204" kern="1200">
           <a:solidFill>
             <a:schemeClr val="tx1"/>
           </a:solidFill>
@@ -3444,8 +3449,8 @@
           <a:cs typeface="+mn-cs"/>
         </a:defRPr>
       </a:lvl3pPr>
-      <a:lvl4pPr marL="1371600" algn="l" defTabSz="457200" rtl="0" eaLnBrk="1" latinLnBrk="0" hangingPunct="1">
-        <a:defRPr sz="1800" kern="1200">
+      <a:lvl4pPr marL="1679113" algn="l" defTabSz="559704" rtl="0" eaLnBrk="1" latinLnBrk="0" hangingPunct="1">
+        <a:defRPr sz="2204" kern="1200">
           <a:solidFill>
             <a:schemeClr val="tx1"/>
           </a:solidFill>
@@ -3454,8 +3459,8 @@
           <a:cs typeface="+mn-cs"/>
         </a:defRPr>
       </a:lvl4pPr>
-      <a:lvl5pPr marL="1828800" algn="l" defTabSz="457200" rtl="0" eaLnBrk="1" latinLnBrk="0" hangingPunct="1">
-        <a:defRPr sz="1800" kern="1200">
+      <a:lvl5pPr marL="2238817" algn="l" defTabSz="559704" rtl="0" eaLnBrk="1" latinLnBrk="0" hangingPunct="1">
+        <a:defRPr sz="2204" kern="1200">
           <a:solidFill>
             <a:schemeClr val="tx1"/>
           </a:solidFill>
@@ -3464,8 +3469,8 @@
           <a:cs typeface="+mn-cs"/>
         </a:defRPr>
       </a:lvl5pPr>
-      <a:lvl6pPr marL="2286000" algn="l" defTabSz="457200" rtl="0" eaLnBrk="1" latinLnBrk="0" hangingPunct="1">
-        <a:defRPr sz="1800" kern="1200">
+      <a:lvl6pPr marL="2798521" algn="l" defTabSz="559704" rtl="0" eaLnBrk="1" latinLnBrk="0" hangingPunct="1">
+        <a:defRPr sz="2204" kern="1200">
           <a:solidFill>
             <a:schemeClr val="tx1"/>
           </a:solidFill>
@@ -3474,8 +3479,8 @@
           <a:cs typeface="+mn-cs"/>
         </a:defRPr>
       </a:lvl6pPr>
-      <a:lvl7pPr marL="2743200" algn="l" defTabSz="457200" rtl="0" eaLnBrk="1" latinLnBrk="0" hangingPunct="1">
-        <a:defRPr sz="1800" kern="1200">
+      <a:lvl7pPr marL="3358225" algn="l" defTabSz="559704" rtl="0" eaLnBrk="1" latinLnBrk="0" hangingPunct="1">
+        <a:defRPr sz="2204" kern="1200">
           <a:solidFill>
             <a:schemeClr val="tx1"/>
           </a:solidFill>
@@ -3484,8 +3489,8 @@
           <a:cs typeface="+mn-cs"/>
         </a:defRPr>
       </a:lvl7pPr>
-      <a:lvl8pPr marL="3200400" algn="l" defTabSz="457200" rtl="0" eaLnBrk="1" latinLnBrk="0" hangingPunct="1">
-        <a:defRPr sz="1800" kern="1200">
+      <a:lvl8pPr marL="3917930" algn="l" defTabSz="559704" rtl="0" eaLnBrk="1" latinLnBrk="0" hangingPunct="1">
+        <a:defRPr sz="2204" kern="1200">
           <a:solidFill>
             <a:schemeClr val="tx1"/>
           </a:solidFill>
@@ -3494,8 +3499,8 @@
           <a:cs typeface="+mn-cs"/>
         </a:defRPr>
       </a:lvl8pPr>
-      <a:lvl9pPr marL="3657600" algn="l" defTabSz="457200" rtl="0" eaLnBrk="1" latinLnBrk="0" hangingPunct="1">
-        <a:defRPr sz="1800" kern="1200">
+      <a:lvl9pPr marL="4477634" algn="l" defTabSz="559704" rtl="0" eaLnBrk="1" latinLnBrk="0" hangingPunct="1">
+        <a:defRPr sz="2204" kern="1200">
           <a:solidFill>
             <a:schemeClr val="tx1"/>
           </a:solidFill>
@@ -3534,8 +3539,8 @@
         </p:nvSpPr>
         <p:spPr>
           <a:xfrm>
-            <a:off x="-1" y="0"/>
-            <a:ext cx="5940425" cy="2517289"/>
+            <a:off x="0" y="-912086"/>
+            <a:ext cx="7272338" cy="3081695"/>
           </a:xfrm>
           <a:prstGeom prst="rect">
             <a:avLst/>
@@ -3569,7 +3574,7 @@
           <a:p>
             <a:pPr algn="ctr"/>
             <a:r>
-              <a:rPr sz="1000" b="1" dirty="0">
+              <a:rPr sz="1224" b="1" dirty="0">
                 <a:solidFill>
                   <a:srgbClr val="333333"/>
                 </a:solidFill>

--- a/figures/fig3/fig3.pptx
+++ b/figures/fig3/fig3.pptx
@@ -3539,8 +3539,8 @@
         </p:nvSpPr>
         <p:spPr>
           <a:xfrm>
-            <a:off x="0" y="-912086"/>
-            <a:ext cx="7272338" cy="3081695"/>
+            <a:off x="96816" y="-912086"/>
+            <a:ext cx="7089458" cy="3081695"/>
           </a:xfrm>
           <a:prstGeom prst="rect">
             <a:avLst/>

--- a/figures/fig3/fig3.pptx
+++ b/figures/fig3/fig3.pptx
@@ -3539,8 +3539,8 @@
         </p:nvSpPr>
         <p:spPr>
           <a:xfrm>
-            <a:off x="96816" y="-912086"/>
-            <a:ext cx="7089458" cy="3081695"/>
+            <a:off x="139848" y="-912086"/>
+            <a:ext cx="6992636" cy="3081695"/>
           </a:xfrm>
           <a:prstGeom prst="rect">
             <a:avLst/>

--- a/figures/fig3/fig3.pptx
+++ b/figures/fig3/fig3.pptx
@@ -10,7 +10,7 @@
   <p:sldIdLst>
     <p:sldId id="256" r:id="rId2"/>
   </p:sldIdLst>
-  <p:sldSz cx="7272338" cy="8135938"/>
+  <p:sldSz cx="5940425" cy="8135938"/>
   <p:notesSz cx="6858000" cy="9144000"/>
   <p:defaultTextStyle>
     <a:defPPr>
@@ -110,12 +110,12 @@
   <p:extLst>
     <p:ext uri="{EFAFB233-063F-42B5-8137-9DF3F51BA10A}">
       <p15:sldGuideLst xmlns:p15="http://schemas.microsoft.com/office/powerpoint/2012/main">
-        <p15:guide id="1" orient="horz" pos="2160" userDrawn="1">
+        <p15:guide id="1" orient="horz" pos="2160">
           <p15:clr>
             <a:srgbClr val="A4A3A4"/>
           </p15:clr>
         </p15:guide>
-        <p15:guide id="2" pos="3526" userDrawn="1">
+        <p15:guide id="2" pos="2880">
           <p15:clr>
             <a:srgbClr val="A4A3A4"/>
           </p15:clr>
@@ -226,8 +226,8 @@
         </p:nvSpPr>
         <p:spPr>
           <a:xfrm>
-            <a:off x="2051050" y="1143000"/>
-            <a:ext cx="2755900" cy="3086100"/>
+            <a:off x="2301875" y="1143000"/>
+            <a:ext cx="2254250" cy="3086100"/>
           </a:xfrm>
           <a:prstGeom prst="rect">
             <a:avLst/>
@@ -502,12 +502,7 @@
             <p:ph type="sldImg"/>
           </p:nvPr>
         </p:nvSpPr>
-        <p:spPr>
-          <a:xfrm>
-            <a:off x="2051050" y="1143000"/>
-            <a:ext cx="2755900" cy="3086100"/>
-          </a:xfrm>
-        </p:spPr>
+        <p:spPr/>
       </p:sp>
       <p:sp>
         <p:nvSpPr>
@@ -593,8 +588,8 @@
         </p:nvSpPr>
         <p:spPr>
           <a:xfrm>
-            <a:off x="839565" y="2130426"/>
-            <a:ext cx="9515063" cy="1470025"/>
+            <a:off x="685800" y="2130425"/>
+            <a:ext cx="7772400" cy="1470025"/>
           </a:xfrm>
         </p:spPr>
         <p:txBody>
@@ -620,8 +615,8 @@
         </p:nvSpPr>
         <p:spPr>
           <a:xfrm>
-            <a:off x="1679129" y="3886200"/>
-            <a:ext cx="7835934" cy="1752600"/>
+            <a:off x="1371600" y="3886200"/>
+            <a:ext cx="6400800" cy="1752600"/>
           </a:xfrm>
         </p:spPr>
         <p:txBody>
@@ -637,7 +632,7 @@
                 </a:solidFill>
               </a:defRPr>
             </a:lvl1pPr>
-            <a:lvl2pPr marL="559704" indent="0" algn="ctr">
+            <a:lvl2pPr marL="457200" indent="0" algn="ctr">
               <a:buNone/>
               <a:defRPr>
                 <a:solidFill>
@@ -647,7 +642,7 @@
                 </a:solidFill>
               </a:defRPr>
             </a:lvl2pPr>
-            <a:lvl3pPr marL="1119408" indent="0" algn="ctr">
+            <a:lvl3pPr marL="914400" indent="0" algn="ctr">
               <a:buNone/>
               <a:defRPr>
                 <a:solidFill>
@@ -657,7 +652,7 @@
                 </a:solidFill>
               </a:defRPr>
             </a:lvl3pPr>
-            <a:lvl4pPr marL="1679113" indent="0" algn="ctr">
+            <a:lvl4pPr marL="1371600" indent="0" algn="ctr">
               <a:buNone/>
               <a:defRPr>
                 <a:solidFill>
@@ -667,7 +662,7 @@
                 </a:solidFill>
               </a:defRPr>
             </a:lvl4pPr>
-            <a:lvl5pPr marL="2238817" indent="0" algn="ctr">
+            <a:lvl5pPr marL="1828800" indent="0" algn="ctr">
               <a:buNone/>
               <a:defRPr>
                 <a:solidFill>
@@ -677,7 +672,7 @@
                 </a:solidFill>
               </a:defRPr>
             </a:lvl5pPr>
-            <a:lvl6pPr marL="2798521" indent="0" algn="ctr">
+            <a:lvl6pPr marL="2286000" indent="0" algn="ctr">
               <a:buNone/>
               <a:defRPr>
                 <a:solidFill>
@@ -687,7 +682,7 @@
                 </a:solidFill>
               </a:defRPr>
             </a:lvl6pPr>
-            <a:lvl7pPr marL="3358225" indent="0" algn="ctr">
+            <a:lvl7pPr marL="2743200" indent="0" algn="ctr">
               <a:buNone/>
               <a:defRPr>
                 <a:solidFill>
@@ -697,7 +692,7 @@
                 </a:solidFill>
               </a:defRPr>
             </a:lvl7pPr>
-            <a:lvl8pPr marL="3917930" indent="0" algn="ctr">
+            <a:lvl8pPr marL="3200400" indent="0" algn="ctr">
               <a:buNone/>
               <a:defRPr>
                 <a:solidFill>
@@ -707,7 +702,7 @@
                 </a:solidFill>
               </a:defRPr>
             </a:lvl8pPr>
-            <a:lvl9pPr marL="4477634" indent="0" algn="ctr">
+            <a:lvl9pPr marL="3657600" indent="0" algn="ctr">
               <a:buNone/>
               <a:defRPr>
                 <a:solidFill>
@@ -1001,8 +996,8 @@
         </p:nvSpPr>
         <p:spPr>
           <a:xfrm>
-            <a:off x="8115789" y="274639"/>
-            <a:ext cx="2518693" cy="5851525"/>
+            <a:off x="6629400" y="274638"/>
+            <a:ext cx="2057400" cy="5851525"/>
           </a:xfrm>
         </p:spPr>
         <p:txBody>
@@ -1028,8 +1023,8 @@
         </p:nvSpPr>
         <p:spPr>
           <a:xfrm>
-            <a:off x="559710" y="274639"/>
-            <a:ext cx="7369510" cy="5851525"/>
+            <a:off x="457200" y="274638"/>
+            <a:ext cx="6019800" cy="5851525"/>
           </a:xfrm>
         </p:spPr>
         <p:txBody>
@@ -1347,15 +1342,15 @@
         </p:nvSpPr>
         <p:spPr>
           <a:xfrm>
-            <a:off x="884264" y="4406901"/>
-            <a:ext cx="9515063" cy="1362075"/>
+            <a:off x="722313" y="4406900"/>
+            <a:ext cx="7772400" cy="1362075"/>
           </a:xfrm>
         </p:spPr>
         <p:txBody>
           <a:bodyPr anchor="t"/>
           <a:lstStyle>
             <a:lvl1pPr algn="l">
-              <a:defRPr sz="4897" b="1" cap="all"/>
+              <a:defRPr sz="4000" b="1" cap="all"/>
             </a:lvl1pPr>
           </a:lstStyle>
           <a:p>
@@ -1378,8 +1373,8 @@
         </p:nvSpPr>
         <p:spPr>
           <a:xfrm>
-            <a:off x="884264" y="2906714"/>
-            <a:ext cx="9515063" cy="1500187"/>
+            <a:off x="722313" y="2906713"/>
+            <a:ext cx="7772400" cy="1500187"/>
           </a:xfrm>
         </p:spPr>
         <p:txBody>
@@ -1387,7 +1382,7 @@
           <a:lstStyle>
             <a:lvl1pPr marL="0" indent="0">
               <a:buNone/>
-              <a:defRPr sz="2448">
+              <a:defRPr sz="2000">
                 <a:solidFill>
                   <a:schemeClr val="tx1">
                     <a:tint val="75000"/>
@@ -1395,9 +1390,9 @@
                 </a:solidFill>
               </a:defRPr>
             </a:lvl1pPr>
-            <a:lvl2pPr marL="559704" indent="0">
-              <a:buNone/>
-              <a:defRPr sz="2204">
+            <a:lvl2pPr marL="457200" indent="0">
+              <a:buNone/>
+              <a:defRPr sz="1800">
                 <a:solidFill>
                   <a:schemeClr val="tx1">
                     <a:tint val="75000"/>
@@ -1405,9 +1400,9 @@
                 </a:solidFill>
               </a:defRPr>
             </a:lvl2pPr>
-            <a:lvl3pPr marL="1119408" indent="0">
-              <a:buNone/>
-              <a:defRPr sz="1959">
+            <a:lvl3pPr marL="914400" indent="0">
+              <a:buNone/>
+              <a:defRPr sz="1600">
                 <a:solidFill>
                   <a:schemeClr val="tx1">
                     <a:tint val="75000"/>
@@ -1415,9 +1410,9 @@
                 </a:solidFill>
               </a:defRPr>
             </a:lvl3pPr>
-            <a:lvl4pPr marL="1679113" indent="0">
-              <a:buNone/>
-              <a:defRPr sz="1714">
+            <a:lvl4pPr marL="1371600" indent="0">
+              <a:buNone/>
+              <a:defRPr sz="1400">
                 <a:solidFill>
                   <a:schemeClr val="tx1">
                     <a:tint val="75000"/>
@@ -1425,9 +1420,9 @@
                 </a:solidFill>
               </a:defRPr>
             </a:lvl4pPr>
-            <a:lvl5pPr marL="2238817" indent="0">
-              <a:buNone/>
-              <a:defRPr sz="1714">
+            <a:lvl5pPr marL="1828800" indent="0">
+              <a:buNone/>
+              <a:defRPr sz="1400">
                 <a:solidFill>
                   <a:schemeClr val="tx1">
                     <a:tint val="75000"/>
@@ -1435,9 +1430,9 @@
                 </a:solidFill>
               </a:defRPr>
             </a:lvl5pPr>
-            <a:lvl6pPr marL="2798521" indent="0">
-              <a:buNone/>
-              <a:defRPr sz="1714">
+            <a:lvl6pPr marL="2286000" indent="0">
+              <a:buNone/>
+              <a:defRPr sz="1400">
                 <a:solidFill>
                   <a:schemeClr val="tx1">
                     <a:tint val="75000"/>
@@ -1445,9 +1440,9 @@
                 </a:solidFill>
               </a:defRPr>
             </a:lvl6pPr>
-            <a:lvl7pPr marL="3358225" indent="0">
-              <a:buNone/>
-              <a:defRPr sz="1714">
+            <a:lvl7pPr marL="2743200" indent="0">
+              <a:buNone/>
+              <a:defRPr sz="1400">
                 <a:solidFill>
                   <a:schemeClr val="tx1">
                     <a:tint val="75000"/>
@@ -1455,9 +1450,9 @@
                 </a:solidFill>
               </a:defRPr>
             </a:lvl7pPr>
-            <a:lvl8pPr marL="3917930" indent="0">
-              <a:buNone/>
-              <a:defRPr sz="1714">
+            <a:lvl8pPr marL="3200400" indent="0">
+              <a:buNone/>
+              <a:defRPr sz="1400">
                 <a:solidFill>
                   <a:schemeClr val="tx1">
                     <a:tint val="75000"/>
@@ -1465,9 +1460,9 @@
                 </a:solidFill>
               </a:defRPr>
             </a:lvl8pPr>
-            <a:lvl9pPr marL="4477634" indent="0">
-              <a:buNone/>
-              <a:defRPr sz="1714">
+            <a:lvl9pPr marL="3657600" indent="0">
+              <a:buNone/>
+              <a:defRPr sz="1400">
                 <a:solidFill>
                   <a:schemeClr val="tx1">
                     <a:tint val="75000"/>
@@ -1614,39 +1609,39 @@
         </p:nvSpPr>
         <p:spPr>
           <a:xfrm>
-            <a:off x="559709" y="1600201"/>
-            <a:ext cx="4944102" cy="4525963"/>
+            <a:off x="457200" y="1600200"/>
+            <a:ext cx="4038600" cy="4525963"/>
           </a:xfrm>
         </p:spPr>
         <p:txBody>
           <a:bodyPr/>
           <a:lstStyle>
             <a:lvl1pPr>
-              <a:defRPr sz="3428"/>
+              <a:defRPr sz="2800"/>
             </a:lvl1pPr>
             <a:lvl2pPr>
-              <a:defRPr sz="2938"/>
+              <a:defRPr sz="2400"/>
             </a:lvl2pPr>
             <a:lvl3pPr>
-              <a:defRPr sz="2448"/>
+              <a:defRPr sz="2000"/>
             </a:lvl3pPr>
             <a:lvl4pPr>
-              <a:defRPr sz="2204"/>
+              <a:defRPr sz="1800"/>
             </a:lvl4pPr>
             <a:lvl5pPr>
-              <a:defRPr sz="2204"/>
+              <a:defRPr sz="1800"/>
             </a:lvl5pPr>
             <a:lvl6pPr>
-              <a:defRPr sz="2204"/>
+              <a:defRPr sz="1800"/>
             </a:lvl6pPr>
             <a:lvl7pPr>
-              <a:defRPr sz="2204"/>
+              <a:defRPr sz="1800"/>
             </a:lvl7pPr>
             <a:lvl8pPr>
-              <a:defRPr sz="2204"/>
+              <a:defRPr sz="1800"/>
             </a:lvl8pPr>
             <a:lvl9pPr>
-              <a:defRPr sz="2204"/>
+              <a:defRPr sz="1800"/>
             </a:lvl9pPr>
           </a:lstStyle>
           <a:p>
@@ -1698,39 +1693,39 @@
         </p:nvSpPr>
         <p:spPr>
           <a:xfrm>
-            <a:off x="5690381" y="1600201"/>
-            <a:ext cx="4944102" cy="4525963"/>
+            <a:off x="4648200" y="1600200"/>
+            <a:ext cx="4038600" cy="4525963"/>
           </a:xfrm>
         </p:spPr>
         <p:txBody>
           <a:bodyPr/>
           <a:lstStyle>
             <a:lvl1pPr>
-              <a:defRPr sz="3428"/>
+              <a:defRPr sz="2800"/>
             </a:lvl1pPr>
             <a:lvl2pPr>
-              <a:defRPr sz="2938"/>
+              <a:defRPr sz="2400"/>
             </a:lvl2pPr>
             <a:lvl3pPr>
-              <a:defRPr sz="2448"/>
+              <a:defRPr sz="2000"/>
             </a:lvl3pPr>
             <a:lvl4pPr>
-              <a:defRPr sz="2204"/>
+              <a:defRPr sz="1800"/>
             </a:lvl4pPr>
             <a:lvl5pPr>
-              <a:defRPr sz="2204"/>
+              <a:defRPr sz="1800"/>
             </a:lvl5pPr>
             <a:lvl6pPr>
-              <a:defRPr sz="2204"/>
+              <a:defRPr sz="1800"/>
             </a:lvl6pPr>
             <a:lvl7pPr>
-              <a:defRPr sz="2204"/>
+              <a:defRPr sz="1800"/>
             </a:lvl7pPr>
             <a:lvl8pPr>
-              <a:defRPr sz="2204"/>
+              <a:defRPr sz="1800"/>
             </a:lvl8pPr>
             <a:lvl9pPr>
-              <a:defRPr sz="2204"/>
+              <a:defRPr sz="1800"/>
             </a:lvl9pPr>
           </a:lstStyle>
           <a:p>
@@ -1903,8 +1898,8 @@
         </p:nvSpPr>
         <p:spPr>
           <a:xfrm>
-            <a:off x="559709" y="1535113"/>
-            <a:ext cx="4946046" cy="639762"/>
+            <a:off x="457200" y="1535113"/>
+            <a:ext cx="4040188" cy="639762"/>
           </a:xfrm>
         </p:spPr>
         <p:txBody>
@@ -1912,39 +1907,39 @@
           <a:lstStyle>
             <a:lvl1pPr marL="0" indent="0">
               <a:buNone/>
-              <a:defRPr sz="2938" b="1"/>
+              <a:defRPr sz="2400" b="1"/>
             </a:lvl1pPr>
-            <a:lvl2pPr marL="559704" indent="0">
-              <a:buNone/>
-              <a:defRPr sz="2448" b="1"/>
+            <a:lvl2pPr marL="457200" indent="0">
+              <a:buNone/>
+              <a:defRPr sz="2000" b="1"/>
             </a:lvl2pPr>
-            <a:lvl3pPr marL="1119408" indent="0">
-              <a:buNone/>
-              <a:defRPr sz="2204" b="1"/>
+            <a:lvl3pPr marL="914400" indent="0">
+              <a:buNone/>
+              <a:defRPr sz="1800" b="1"/>
             </a:lvl3pPr>
-            <a:lvl4pPr marL="1679113" indent="0">
-              <a:buNone/>
-              <a:defRPr sz="1959" b="1"/>
+            <a:lvl4pPr marL="1371600" indent="0">
+              <a:buNone/>
+              <a:defRPr sz="1600" b="1"/>
             </a:lvl4pPr>
-            <a:lvl5pPr marL="2238817" indent="0">
-              <a:buNone/>
-              <a:defRPr sz="1959" b="1"/>
+            <a:lvl5pPr marL="1828800" indent="0">
+              <a:buNone/>
+              <a:defRPr sz="1600" b="1"/>
             </a:lvl5pPr>
-            <a:lvl6pPr marL="2798521" indent="0">
-              <a:buNone/>
-              <a:defRPr sz="1959" b="1"/>
+            <a:lvl6pPr marL="2286000" indent="0">
+              <a:buNone/>
+              <a:defRPr sz="1600" b="1"/>
             </a:lvl6pPr>
-            <a:lvl7pPr marL="3358225" indent="0">
-              <a:buNone/>
-              <a:defRPr sz="1959" b="1"/>
+            <a:lvl7pPr marL="2743200" indent="0">
+              <a:buNone/>
+              <a:defRPr sz="1600" b="1"/>
             </a:lvl7pPr>
-            <a:lvl8pPr marL="3917930" indent="0">
-              <a:buNone/>
-              <a:defRPr sz="1959" b="1"/>
+            <a:lvl8pPr marL="3200400" indent="0">
+              <a:buNone/>
+              <a:defRPr sz="1600" b="1"/>
             </a:lvl8pPr>
-            <a:lvl9pPr marL="4477634" indent="0">
-              <a:buNone/>
-              <a:defRPr sz="1959" b="1"/>
+            <a:lvl9pPr marL="3657600" indent="0">
+              <a:buNone/>
+              <a:defRPr sz="1600" b="1"/>
             </a:lvl9pPr>
           </a:lstStyle>
           <a:p>
@@ -1968,39 +1963,39 @@
         </p:nvSpPr>
         <p:spPr>
           <a:xfrm>
-            <a:off x="559709" y="2174875"/>
-            <a:ext cx="4946046" cy="3951288"/>
+            <a:off x="457200" y="2174875"/>
+            <a:ext cx="4040188" cy="3951288"/>
           </a:xfrm>
         </p:spPr>
         <p:txBody>
           <a:bodyPr/>
           <a:lstStyle>
             <a:lvl1pPr>
-              <a:defRPr sz="2938"/>
+              <a:defRPr sz="2400"/>
             </a:lvl1pPr>
             <a:lvl2pPr>
-              <a:defRPr sz="2448"/>
+              <a:defRPr sz="2000"/>
             </a:lvl2pPr>
             <a:lvl3pPr>
-              <a:defRPr sz="2204"/>
+              <a:defRPr sz="1800"/>
             </a:lvl3pPr>
             <a:lvl4pPr>
-              <a:defRPr sz="1959"/>
+              <a:defRPr sz="1600"/>
             </a:lvl4pPr>
             <a:lvl5pPr>
-              <a:defRPr sz="1959"/>
+              <a:defRPr sz="1600"/>
             </a:lvl5pPr>
             <a:lvl6pPr>
-              <a:defRPr sz="1959"/>
+              <a:defRPr sz="1600"/>
             </a:lvl6pPr>
             <a:lvl7pPr>
-              <a:defRPr sz="1959"/>
+              <a:defRPr sz="1600"/>
             </a:lvl7pPr>
             <a:lvl8pPr>
-              <a:defRPr sz="1959"/>
+              <a:defRPr sz="1600"/>
             </a:lvl8pPr>
             <a:lvl9pPr>
-              <a:defRPr sz="1959"/>
+              <a:defRPr sz="1600"/>
             </a:lvl9pPr>
           </a:lstStyle>
           <a:p>
@@ -2052,8 +2047,8 @@
         </p:nvSpPr>
         <p:spPr>
           <a:xfrm>
-            <a:off x="5686495" y="1535113"/>
-            <a:ext cx="4947988" cy="639762"/>
+            <a:off x="4645025" y="1535113"/>
+            <a:ext cx="4041775" cy="639762"/>
           </a:xfrm>
         </p:spPr>
         <p:txBody>
@@ -2061,39 +2056,39 @@
           <a:lstStyle>
             <a:lvl1pPr marL="0" indent="0">
               <a:buNone/>
-              <a:defRPr sz="2938" b="1"/>
+              <a:defRPr sz="2400" b="1"/>
             </a:lvl1pPr>
-            <a:lvl2pPr marL="559704" indent="0">
-              <a:buNone/>
-              <a:defRPr sz="2448" b="1"/>
+            <a:lvl2pPr marL="457200" indent="0">
+              <a:buNone/>
+              <a:defRPr sz="2000" b="1"/>
             </a:lvl2pPr>
-            <a:lvl3pPr marL="1119408" indent="0">
-              <a:buNone/>
-              <a:defRPr sz="2204" b="1"/>
+            <a:lvl3pPr marL="914400" indent="0">
+              <a:buNone/>
+              <a:defRPr sz="1800" b="1"/>
             </a:lvl3pPr>
-            <a:lvl4pPr marL="1679113" indent="0">
-              <a:buNone/>
-              <a:defRPr sz="1959" b="1"/>
+            <a:lvl4pPr marL="1371600" indent="0">
+              <a:buNone/>
+              <a:defRPr sz="1600" b="1"/>
             </a:lvl4pPr>
-            <a:lvl5pPr marL="2238817" indent="0">
-              <a:buNone/>
-              <a:defRPr sz="1959" b="1"/>
+            <a:lvl5pPr marL="1828800" indent="0">
+              <a:buNone/>
+              <a:defRPr sz="1600" b="1"/>
             </a:lvl5pPr>
-            <a:lvl6pPr marL="2798521" indent="0">
-              <a:buNone/>
-              <a:defRPr sz="1959" b="1"/>
+            <a:lvl6pPr marL="2286000" indent="0">
+              <a:buNone/>
+              <a:defRPr sz="1600" b="1"/>
             </a:lvl6pPr>
-            <a:lvl7pPr marL="3358225" indent="0">
-              <a:buNone/>
-              <a:defRPr sz="1959" b="1"/>
+            <a:lvl7pPr marL="2743200" indent="0">
+              <a:buNone/>
+              <a:defRPr sz="1600" b="1"/>
             </a:lvl7pPr>
-            <a:lvl8pPr marL="3917930" indent="0">
-              <a:buNone/>
-              <a:defRPr sz="1959" b="1"/>
+            <a:lvl8pPr marL="3200400" indent="0">
+              <a:buNone/>
+              <a:defRPr sz="1600" b="1"/>
             </a:lvl8pPr>
-            <a:lvl9pPr marL="4477634" indent="0">
-              <a:buNone/>
-              <a:defRPr sz="1959" b="1"/>
+            <a:lvl9pPr marL="3657600" indent="0">
+              <a:buNone/>
+              <a:defRPr sz="1600" b="1"/>
             </a:lvl9pPr>
           </a:lstStyle>
           <a:p>
@@ -2117,39 +2112,39 @@
         </p:nvSpPr>
         <p:spPr>
           <a:xfrm>
-            <a:off x="5686495" y="2174875"/>
-            <a:ext cx="4947988" cy="3951288"/>
+            <a:off x="4645025" y="2174875"/>
+            <a:ext cx="4041775" cy="3951288"/>
           </a:xfrm>
         </p:spPr>
         <p:txBody>
           <a:bodyPr/>
           <a:lstStyle>
             <a:lvl1pPr>
-              <a:defRPr sz="2938"/>
+              <a:defRPr sz="2400"/>
             </a:lvl1pPr>
             <a:lvl2pPr>
-              <a:defRPr sz="2448"/>
+              <a:defRPr sz="2000"/>
             </a:lvl2pPr>
             <a:lvl3pPr>
-              <a:defRPr sz="2204"/>
+              <a:defRPr sz="1800"/>
             </a:lvl3pPr>
             <a:lvl4pPr>
-              <a:defRPr sz="1959"/>
+              <a:defRPr sz="1600"/>
             </a:lvl4pPr>
             <a:lvl5pPr>
-              <a:defRPr sz="1959"/>
+              <a:defRPr sz="1600"/>
             </a:lvl5pPr>
             <a:lvl6pPr>
-              <a:defRPr sz="1959"/>
+              <a:defRPr sz="1600"/>
             </a:lvl6pPr>
             <a:lvl7pPr>
-              <a:defRPr sz="1959"/>
+              <a:defRPr sz="1600"/>
             </a:lvl7pPr>
             <a:lvl8pPr>
-              <a:defRPr sz="1959"/>
+              <a:defRPr sz="1600"/>
             </a:lvl8pPr>
             <a:lvl9pPr>
-              <a:defRPr sz="1959"/>
+              <a:defRPr sz="1600"/>
             </a:lvl9pPr>
           </a:lstStyle>
           <a:p>
@@ -2508,15 +2503,15 @@
         </p:nvSpPr>
         <p:spPr>
           <a:xfrm>
-            <a:off x="559710" y="273050"/>
-            <a:ext cx="3682812" cy="1162050"/>
+            <a:off x="457200" y="273050"/>
+            <a:ext cx="3008313" cy="1162050"/>
           </a:xfrm>
         </p:spPr>
         <p:txBody>
           <a:bodyPr anchor="b"/>
           <a:lstStyle>
             <a:lvl1pPr algn="l">
-              <a:defRPr sz="2448" b="1"/>
+              <a:defRPr sz="2000" b="1"/>
             </a:lvl1pPr>
           </a:lstStyle>
           <a:p>
@@ -2539,39 +2534,39 @@
         </p:nvSpPr>
         <p:spPr>
           <a:xfrm>
-            <a:off x="4376618" y="273051"/>
-            <a:ext cx="6257864" cy="5853113"/>
+            <a:off x="3575050" y="273050"/>
+            <a:ext cx="5111750" cy="5853113"/>
           </a:xfrm>
         </p:spPr>
         <p:txBody>
           <a:bodyPr/>
           <a:lstStyle>
             <a:lvl1pPr>
-              <a:defRPr sz="3917"/>
+              <a:defRPr sz="3200"/>
             </a:lvl1pPr>
             <a:lvl2pPr>
-              <a:defRPr sz="3428"/>
+              <a:defRPr sz="2800"/>
             </a:lvl2pPr>
             <a:lvl3pPr>
-              <a:defRPr sz="2938"/>
+              <a:defRPr sz="2400"/>
             </a:lvl3pPr>
             <a:lvl4pPr>
-              <a:defRPr sz="2448"/>
+              <a:defRPr sz="2000"/>
             </a:lvl4pPr>
             <a:lvl5pPr>
-              <a:defRPr sz="2448"/>
+              <a:defRPr sz="2000"/>
             </a:lvl5pPr>
             <a:lvl6pPr>
-              <a:defRPr sz="2448"/>
+              <a:defRPr sz="2000"/>
             </a:lvl6pPr>
             <a:lvl7pPr>
-              <a:defRPr sz="2448"/>
+              <a:defRPr sz="2000"/>
             </a:lvl7pPr>
             <a:lvl8pPr>
-              <a:defRPr sz="2448"/>
+              <a:defRPr sz="2000"/>
             </a:lvl8pPr>
             <a:lvl9pPr>
-              <a:defRPr sz="2448"/>
+              <a:defRPr sz="2000"/>
             </a:lvl9pPr>
           </a:lstStyle>
           <a:p>
@@ -2623,8 +2618,8 @@
         </p:nvSpPr>
         <p:spPr>
           <a:xfrm>
-            <a:off x="559710" y="1435101"/>
-            <a:ext cx="3682812" cy="4691063"/>
+            <a:off x="457200" y="1435100"/>
+            <a:ext cx="3008313" cy="4691063"/>
           </a:xfrm>
         </p:spPr>
         <p:txBody>
@@ -2632,39 +2627,39 @@
           <a:lstStyle>
             <a:lvl1pPr marL="0" indent="0">
               <a:buNone/>
-              <a:defRPr sz="1714"/>
+              <a:defRPr sz="1400"/>
             </a:lvl1pPr>
-            <a:lvl2pPr marL="559704" indent="0">
-              <a:buNone/>
-              <a:defRPr sz="1469"/>
+            <a:lvl2pPr marL="457200" indent="0">
+              <a:buNone/>
+              <a:defRPr sz="1200"/>
             </a:lvl2pPr>
-            <a:lvl3pPr marL="1119408" indent="0">
-              <a:buNone/>
-              <a:defRPr sz="1224"/>
+            <a:lvl3pPr marL="914400" indent="0">
+              <a:buNone/>
+              <a:defRPr sz="1000"/>
             </a:lvl3pPr>
-            <a:lvl4pPr marL="1679113" indent="0">
-              <a:buNone/>
-              <a:defRPr sz="1102"/>
+            <a:lvl4pPr marL="1371600" indent="0">
+              <a:buNone/>
+              <a:defRPr sz="900"/>
             </a:lvl4pPr>
-            <a:lvl5pPr marL="2238817" indent="0">
-              <a:buNone/>
-              <a:defRPr sz="1102"/>
+            <a:lvl5pPr marL="1828800" indent="0">
+              <a:buNone/>
+              <a:defRPr sz="900"/>
             </a:lvl5pPr>
-            <a:lvl6pPr marL="2798521" indent="0">
-              <a:buNone/>
-              <a:defRPr sz="1102"/>
+            <a:lvl6pPr marL="2286000" indent="0">
+              <a:buNone/>
+              <a:defRPr sz="900"/>
             </a:lvl6pPr>
-            <a:lvl7pPr marL="3358225" indent="0">
-              <a:buNone/>
-              <a:defRPr sz="1102"/>
+            <a:lvl7pPr marL="2743200" indent="0">
+              <a:buNone/>
+              <a:defRPr sz="900"/>
             </a:lvl7pPr>
-            <a:lvl8pPr marL="3917930" indent="0">
-              <a:buNone/>
-              <a:defRPr sz="1102"/>
+            <a:lvl8pPr marL="3200400" indent="0">
+              <a:buNone/>
+              <a:defRPr sz="900"/>
             </a:lvl8pPr>
-            <a:lvl9pPr marL="4477634" indent="0">
-              <a:buNone/>
-              <a:defRPr sz="1102"/>
+            <a:lvl9pPr marL="3657600" indent="0">
+              <a:buNone/>
+              <a:defRPr sz="900"/>
             </a:lvl9pPr>
           </a:lstStyle>
           <a:p>
@@ -2783,15 +2778,15 @@
         </p:nvSpPr>
         <p:spPr>
           <a:xfrm>
-            <a:off x="2194140" y="4800600"/>
-            <a:ext cx="6716515" cy="566738"/>
+            <a:off x="1792288" y="4800600"/>
+            <a:ext cx="5486400" cy="566738"/>
           </a:xfrm>
         </p:spPr>
         <p:txBody>
           <a:bodyPr anchor="b"/>
           <a:lstStyle>
             <a:lvl1pPr algn="l">
-              <a:defRPr sz="2448" b="1"/>
+              <a:defRPr sz="2000" b="1"/>
             </a:lvl1pPr>
           </a:lstStyle>
           <a:p>
@@ -2814,8 +2809,8 @@
         </p:nvSpPr>
         <p:spPr>
           <a:xfrm>
-            <a:off x="2194140" y="612775"/>
-            <a:ext cx="6716515" cy="4114800"/>
+            <a:off x="1792288" y="612775"/>
+            <a:ext cx="5486400" cy="4114800"/>
           </a:xfrm>
         </p:spPr>
         <p:txBody>
@@ -2823,39 +2818,39 @@
           <a:lstStyle>
             <a:lvl1pPr marL="0" indent="0">
               <a:buNone/>
-              <a:defRPr sz="3917"/>
+              <a:defRPr sz="3200"/>
             </a:lvl1pPr>
-            <a:lvl2pPr marL="559704" indent="0">
-              <a:buNone/>
-              <a:defRPr sz="3428"/>
+            <a:lvl2pPr marL="457200" indent="0">
+              <a:buNone/>
+              <a:defRPr sz="2800"/>
             </a:lvl2pPr>
-            <a:lvl3pPr marL="1119408" indent="0">
-              <a:buNone/>
-              <a:defRPr sz="2938"/>
+            <a:lvl3pPr marL="914400" indent="0">
+              <a:buNone/>
+              <a:defRPr sz="2400"/>
             </a:lvl3pPr>
-            <a:lvl4pPr marL="1679113" indent="0">
-              <a:buNone/>
-              <a:defRPr sz="2448"/>
+            <a:lvl4pPr marL="1371600" indent="0">
+              <a:buNone/>
+              <a:defRPr sz="2000"/>
             </a:lvl4pPr>
-            <a:lvl5pPr marL="2238817" indent="0">
-              <a:buNone/>
-              <a:defRPr sz="2448"/>
+            <a:lvl5pPr marL="1828800" indent="0">
+              <a:buNone/>
+              <a:defRPr sz="2000"/>
             </a:lvl5pPr>
-            <a:lvl6pPr marL="2798521" indent="0">
-              <a:buNone/>
-              <a:defRPr sz="2448"/>
+            <a:lvl6pPr marL="2286000" indent="0">
+              <a:buNone/>
+              <a:defRPr sz="2000"/>
             </a:lvl6pPr>
-            <a:lvl7pPr marL="3358225" indent="0">
-              <a:buNone/>
-              <a:defRPr sz="2448"/>
+            <a:lvl7pPr marL="2743200" indent="0">
+              <a:buNone/>
+              <a:defRPr sz="2000"/>
             </a:lvl7pPr>
-            <a:lvl8pPr marL="3917930" indent="0">
-              <a:buNone/>
-              <a:defRPr sz="2448"/>
+            <a:lvl8pPr marL="3200400" indent="0">
+              <a:buNone/>
+              <a:defRPr sz="2000"/>
             </a:lvl8pPr>
-            <a:lvl9pPr marL="4477634" indent="0">
-              <a:buNone/>
-              <a:defRPr sz="2448"/>
+            <a:lvl9pPr marL="3657600" indent="0">
+              <a:buNone/>
+              <a:defRPr sz="2000"/>
             </a:lvl9pPr>
           </a:lstStyle>
           <a:p>
@@ -2875,8 +2870,8 @@
         </p:nvSpPr>
         <p:spPr>
           <a:xfrm>
-            <a:off x="2194140" y="5367338"/>
-            <a:ext cx="6716515" cy="804862"/>
+            <a:off x="1792288" y="5367338"/>
+            <a:ext cx="5486400" cy="804862"/>
           </a:xfrm>
         </p:spPr>
         <p:txBody>
@@ -2884,39 +2879,39 @@
           <a:lstStyle>
             <a:lvl1pPr marL="0" indent="0">
               <a:buNone/>
-              <a:defRPr sz="1714"/>
+              <a:defRPr sz="1400"/>
             </a:lvl1pPr>
-            <a:lvl2pPr marL="559704" indent="0">
-              <a:buNone/>
-              <a:defRPr sz="1469"/>
+            <a:lvl2pPr marL="457200" indent="0">
+              <a:buNone/>
+              <a:defRPr sz="1200"/>
             </a:lvl2pPr>
-            <a:lvl3pPr marL="1119408" indent="0">
-              <a:buNone/>
-              <a:defRPr sz="1224"/>
+            <a:lvl3pPr marL="914400" indent="0">
+              <a:buNone/>
+              <a:defRPr sz="1000"/>
             </a:lvl3pPr>
-            <a:lvl4pPr marL="1679113" indent="0">
-              <a:buNone/>
-              <a:defRPr sz="1102"/>
+            <a:lvl4pPr marL="1371600" indent="0">
+              <a:buNone/>
+              <a:defRPr sz="900"/>
             </a:lvl4pPr>
-            <a:lvl5pPr marL="2238817" indent="0">
-              <a:buNone/>
-              <a:defRPr sz="1102"/>
+            <a:lvl5pPr marL="1828800" indent="0">
+              <a:buNone/>
+              <a:defRPr sz="900"/>
             </a:lvl5pPr>
-            <a:lvl6pPr marL="2798521" indent="0">
-              <a:buNone/>
-              <a:defRPr sz="1102"/>
+            <a:lvl6pPr marL="2286000" indent="0">
+              <a:buNone/>
+              <a:defRPr sz="900"/>
             </a:lvl6pPr>
-            <a:lvl7pPr marL="3358225" indent="0">
-              <a:buNone/>
-              <a:defRPr sz="1102"/>
+            <a:lvl7pPr marL="2743200" indent="0">
+              <a:buNone/>
+              <a:defRPr sz="900"/>
             </a:lvl7pPr>
-            <a:lvl8pPr marL="3917930" indent="0">
-              <a:buNone/>
-              <a:defRPr sz="1102"/>
+            <a:lvl8pPr marL="3200400" indent="0">
+              <a:buNone/>
+              <a:defRPr sz="900"/>
             </a:lvl8pPr>
-            <a:lvl9pPr marL="4477634" indent="0">
-              <a:buNone/>
-              <a:defRPr sz="1102"/>
+            <a:lvl9pPr marL="3657600" indent="0">
+              <a:buNone/>
+              <a:defRPr sz="900"/>
             </a:lvl9pPr>
           </a:lstStyle>
           <a:p>
@@ -3040,8 +3035,8 @@
         </p:nvSpPr>
         <p:spPr>
           <a:xfrm>
-            <a:off x="559710" y="274638"/>
-            <a:ext cx="10074773" cy="1143000"/>
+            <a:off x="457200" y="274638"/>
+            <a:ext cx="8229600" cy="1143000"/>
           </a:xfrm>
           <a:prstGeom prst="rect">
             <a:avLst/>
@@ -3072,8 +3067,8 @@
         </p:nvSpPr>
         <p:spPr>
           <a:xfrm>
-            <a:off x="559710" y="1600201"/>
-            <a:ext cx="10074773" cy="4525963"/>
+            <a:off x="457200" y="1600200"/>
+            <a:ext cx="8229600" cy="4525963"/>
           </a:xfrm>
           <a:prstGeom prst="rect">
             <a:avLst/>
@@ -3133,8 +3128,8 @@
         </p:nvSpPr>
         <p:spPr>
           <a:xfrm>
-            <a:off x="559710" y="6356351"/>
-            <a:ext cx="2611978" cy="365125"/>
+            <a:off x="457200" y="6356350"/>
+            <a:ext cx="2133600" cy="365125"/>
           </a:xfrm>
           <a:prstGeom prst="rect">
             <a:avLst/>
@@ -3144,7 +3139,7 @@
           <a:bodyPr vert="horz" lIns="91440" tIns="45720" rIns="91440" bIns="45720" rtlCol="0" anchor="ctr"/>
           <a:lstStyle>
             <a:lvl1pPr algn="l">
-              <a:defRPr sz="1469">
+              <a:defRPr sz="1200">
                 <a:solidFill>
                   <a:schemeClr val="tx1">
                     <a:tint val="75000"/>
@@ -3174,8 +3169,8 @@
         </p:nvSpPr>
         <p:spPr>
           <a:xfrm>
-            <a:off x="3824682" y="6356351"/>
-            <a:ext cx="3544828" cy="365125"/>
+            <a:off x="3124200" y="6356350"/>
+            <a:ext cx="2895600" cy="365125"/>
           </a:xfrm>
           <a:prstGeom prst="rect">
             <a:avLst/>
@@ -3185,7 +3180,7 @@
           <a:bodyPr vert="horz" lIns="91440" tIns="45720" rIns="91440" bIns="45720" rtlCol="0" anchor="ctr"/>
           <a:lstStyle>
             <a:lvl1pPr algn="ctr">
-              <a:defRPr sz="1469">
+              <a:defRPr sz="1200">
                 <a:solidFill>
                   <a:schemeClr val="tx1">
                     <a:tint val="75000"/>
@@ -3211,8 +3206,8 @@
         </p:nvSpPr>
         <p:spPr>
           <a:xfrm>
-            <a:off x="8022504" y="6356351"/>
-            <a:ext cx="2611978" cy="365125"/>
+            <a:off x="6553200" y="6356350"/>
+            <a:ext cx="2133600" cy="365125"/>
           </a:xfrm>
           <a:prstGeom prst="rect">
             <a:avLst/>
@@ -3222,7 +3217,7 @@
           <a:bodyPr vert="horz" lIns="91440" tIns="45720" rIns="91440" bIns="45720" rtlCol="0" anchor="ctr"/>
           <a:lstStyle>
             <a:lvl1pPr algn="r">
-              <a:defRPr sz="1469">
+              <a:defRPr sz="1200">
                 <a:solidFill>
                   <a:schemeClr val="tx1">
                     <a:tint val="75000"/>
@@ -3263,12 +3258,12 @@
   </p:sldLayoutIdLst>
   <p:txStyles>
     <p:titleStyle>
-      <a:lvl1pPr algn="ctr" defTabSz="559704" rtl="0" eaLnBrk="1" latinLnBrk="0" hangingPunct="1">
+      <a:lvl1pPr algn="ctr" defTabSz="457200" rtl="0" eaLnBrk="1" latinLnBrk="0" hangingPunct="1">
         <a:spcBef>
           <a:spcPct val="0"/>
         </a:spcBef>
         <a:buNone/>
-        <a:defRPr sz="5386" kern="1200">
+        <a:defRPr sz="4400" kern="1200">
           <a:solidFill>
             <a:schemeClr val="tx1"/>
           </a:solidFill>
@@ -3279,13 +3274,13 @@
       </a:lvl1pPr>
     </p:titleStyle>
     <p:bodyStyle>
-      <a:lvl1pPr marL="419778" indent="-419778" algn="l" defTabSz="559704" rtl="0" eaLnBrk="1" latinLnBrk="0" hangingPunct="1">
+      <a:lvl1pPr marL="342900" indent="-342900" algn="l" defTabSz="457200" rtl="0" eaLnBrk="1" latinLnBrk="0" hangingPunct="1">
         <a:spcBef>
           <a:spcPct val="20000"/>
         </a:spcBef>
         <a:buFont typeface="Arial"/>
         <a:buChar char="•"/>
-        <a:defRPr sz="3917" kern="1200">
+        <a:defRPr sz="3200" kern="1200">
           <a:solidFill>
             <a:schemeClr val="tx1"/>
           </a:solidFill>
@@ -3294,13 +3289,13 @@
           <a:cs typeface="+mn-cs"/>
         </a:defRPr>
       </a:lvl1pPr>
-      <a:lvl2pPr marL="909519" indent="-349815" algn="l" defTabSz="559704" rtl="0" eaLnBrk="1" latinLnBrk="0" hangingPunct="1">
+      <a:lvl2pPr marL="742950" indent="-285750" algn="l" defTabSz="457200" rtl="0" eaLnBrk="1" latinLnBrk="0" hangingPunct="1">
         <a:spcBef>
           <a:spcPct val="20000"/>
         </a:spcBef>
         <a:buFont typeface="Arial"/>
         <a:buChar char="–"/>
-        <a:defRPr sz="3428" kern="1200">
+        <a:defRPr sz="2800" kern="1200">
           <a:solidFill>
             <a:schemeClr val="tx1"/>
           </a:solidFill>
@@ -3309,13 +3304,13 @@
           <a:cs typeface="+mn-cs"/>
         </a:defRPr>
       </a:lvl2pPr>
-      <a:lvl3pPr marL="1399261" indent="-279852" algn="l" defTabSz="559704" rtl="0" eaLnBrk="1" latinLnBrk="0" hangingPunct="1">
+      <a:lvl3pPr marL="1143000" indent="-228600" algn="l" defTabSz="457200" rtl="0" eaLnBrk="1" latinLnBrk="0" hangingPunct="1">
         <a:spcBef>
           <a:spcPct val="20000"/>
         </a:spcBef>
         <a:buFont typeface="Arial"/>
         <a:buChar char="•"/>
-        <a:defRPr sz="2938" kern="1200">
+        <a:defRPr sz="2400" kern="1200">
           <a:solidFill>
             <a:schemeClr val="tx1"/>
           </a:solidFill>
@@ -3324,13 +3319,13 @@
           <a:cs typeface="+mn-cs"/>
         </a:defRPr>
       </a:lvl3pPr>
-      <a:lvl4pPr marL="1958965" indent="-279852" algn="l" defTabSz="559704" rtl="0" eaLnBrk="1" latinLnBrk="0" hangingPunct="1">
+      <a:lvl4pPr marL="1600200" indent="-228600" algn="l" defTabSz="457200" rtl="0" eaLnBrk="1" latinLnBrk="0" hangingPunct="1">
         <a:spcBef>
           <a:spcPct val="20000"/>
         </a:spcBef>
         <a:buFont typeface="Arial"/>
         <a:buChar char="–"/>
-        <a:defRPr sz="2448" kern="1200">
+        <a:defRPr sz="2000" kern="1200">
           <a:solidFill>
             <a:schemeClr val="tx1"/>
           </a:solidFill>
@@ -3339,13 +3334,13 @@
           <a:cs typeface="+mn-cs"/>
         </a:defRPr>
       </a:lvl4pPr>
-      <a:lvl5pPr marL="2518669" indent="-279852" algn="l" defTabSz="559704" rtl="0" eaLnBrk="1" latinLnBrk="0" hangingPunct="1">
+      <a:lvl5pPr marL="2057400" indent="-228600" algn="l" defTabSz="457200" rtl="0" eaLnBrk="1" latinLnBrk="0" hangingPunct="1">
         <a:spcBef>
           <a:spcPct val="20000"/>
         </a:spcBef>
         <a:buFont typeface="Arial"/>
         <a:buChar char="»"/>
-        <a:defRPr sz="2448" kern="1200">
+        <a:defRPr sz="2000" kern="1200">
           <a:solidFill>
             <a:schemeClr val="tx1"/>
           </a:solidFill>
@@ -3354,13 +3349,13 @@
           <a:cs typeface="+mn-cs"/>
         </a:defRPr>
       </a:lvl5pPr>
-      <a:lvl6pPr marL="3078373" indent="-279852" algn="l" defTabSz="559704" rtl="0" eaLnBrk="1" latinLnBrk="0" hangingPunct="1">
+      <a:lvl6pPr marL="2514600" indent="-228600" algn="l" defTabSz="457200" rtl="0" eaLnBrk="1" latinLnBrk="0" hangingPunct="1">
         <a:spcBef>
           <a:spcPct val="20000"/>
         </a:spcBef>
         <a:buFont typeface="Arial"/>
         <a:buChar char="•"/>
-        <a:defRPr sz="2448" kern="1200">
+        <a:defRPr sz="2000" kern="1200">
           <a:solidFill>
             <a:schemeClr val="tx1"/>
           </a:solidFill>
@@ -3369,13 +3364,13 @@
           <a:cs typeface="+mn-cs"/>
         </a:defRPr>
       </a:lvl6pPr>
-      <a:lvl7pPr marL="3638078" indent="-279852" algn="l" defTabSz="559704" rtl="0" eaLnBrk="1" latinLnBrk="0" hangingPunct="1">
+      <a:lvl7pPr marL="2971800" indent="-228600" algn="l" defTabSz="457200" rtl="0" eaLnBrk="1" latinLnBrk="0" hangingPunct="1">
         <a:spcBef>
           <a:spcPct val="20000"/>
         </a:spcBef>
         <a:buFont typeface="Arial"/>
         <a:buChar char="•"/>
-        <a:defRPr sz="2448" kern="1200">
+        <a:defRPr sz="2000" kern="1200">
           <a:solidFill>
             <a:schemeClr val="tx1"/>
           </a:solidFill>
@@ -3384,13 +3379,13 @@
           <a:cs typeface="+mn-cs"/>
         </a:defRPr>
       </a:lvl7pPr>
-      <a:lvl8pPr marL="4197782" indent="-279852" algn="l" defTabSz="559704" rtl="0" eaLnBrk="1" latinLnBrk="0" hangingPunct="1">
+      <a:lvl8pPr marL="3429000" indent="-228600" algn="l" defTabSz="457200" rtl="0" eaLnBrk="1" latinLnBrk="0" hangingPunct="1">
         <a:spcBef>
           <a:spcPct val="20000"/>
         </a:spcBef>
         <a:buFont typeface="Arial"/>
         <a:buChar char="•"/>
-        <a:defRPr sz="2448" kern="1200">
+        <a:defRPr sz="2000" kern="1200">
           <a:solidFill>
             <a:schemeClr val="tx1"/>
           </a:solidFill>
@@ -3399,13 +3394,13 @@
           <a:cs typeface="+mn-cs"/>
         </a:defRPr>
       </a:lvl8pPr>
-      <a:lvl9pPr marL="4757486" indent="-279852" algn="l" defTabSz="559704" rtl="0" eaLnBrk="1" latinLnBrk="0" hangingPunct="1">
+      <a:lvl9pPr marL="3886200" indent="-228600" algn="l" defTabSz="457200" rtl="0" eaLnBrk="1" latinLnBrk="0" hangingPunct="1">
         <a:spcBef>
           <a:spcPct val="20000"/>
         </a:spcBef>
         <a:buFont typeface="Arial"/>
         <a:buChar char="•"/>
-        <a:defRPr sz="2448" kern="1200">
+        <a:defRPr sz="2000" kern="1200">
           <a:solidFill>
             <a:schemeClr val="tx1"/>
           </a:solidFill>
@@ -3419,8 +3414,8 @@
       <a:defPPr>
         <a:defRPr lang="en-US"/>
       </a:defPPr>
-      <a:lvl1pPr marL="0" algn="l" defTabSz="559704" rtl="0" eaLnBrk="1" latinLnBrk="0" hangingPunct="1">
-        <a:defRPr sz="2204" kern="1200">
+      <a:lvl1pPr marL="0" algn="l" defTabSz="457200" rtl="0" eaLnBrk="1" latinLnBrk="0" hangingPunct="1">
+        <a:defRPr sz="1800" kern="1200">
           <a:solidFill>
             <a:schemeClr val="tx1"/>
           </a:solidFill>
@@ -3429,8 +3424,8 @@
           <a:cs typeface="+mn-cs"/>
         </a:defRPr>
       </a:lvl1pPr>
-      <a:lvl2pPr marL="559704" algn="l" defTabSz="559704" rtl="0" eaLnBrk="1" latinLnBrk="0" hangingPunct="1">
-        <a:defRPr sz="2204" kern="1200">
+      <a:lvl2pPr marL="457200" algn="l" defTabSz="457200" rtl="0" eaLnBrk="1" latinLnBrk="0" hangingPunct="1">
+        <a:defRPr sz="1800" kern="1200">
           <a:solidFill>
             <a:schemeClr val="tx1"/>
           </a:solidFill>
@@ -3439,8 +3434,8 @@
           <a:cs typeface="+mn-cs"/>
         </a:defRPr>
       </a:lvl2pPr>
-      <a:lvl3pPr marL="1119408" algn="l" defTabSz="559704" rtl="0" eaLnBrk="1" latinLnBrk="0" hangingPunct="1">
-        <a:defRPr sz="2204" kern="1200">
+      <a:lvl3pPr marL="914400" algn="l" defTabSz="457200" rtl="0" eaLnBrk="1" latinLnBrk="0" hangingPunct="1">
+        <a:defRPr sz="1800" kern="1200">
           <a:solidFill>
             <a:schemeClr val="tx1"/>
           </a:solidFill>
@@ -3449,8 +3444,8 @@
           <a:cs typeface="+mn-cs"/>
         </a:defRPr>
       </a:lvl3pPr>
-      <a:lvl4pPr marL="1679113" algn="l" defTabSz="559704" rtl="0" eaLnBrk="1" latinLnBrk="0" hangingPunct="1">
-        <a:defRPr sz="2204" kern="1200">
+      <a:lvl4pPr marL="1371600" algn="l" defTabSz="457200" rtl="0" eaLnBrk="1" latinLnBrk="0" hangingPunct="1">
+        <a:defRPr sz="1800" kern="1200">
           <a:solidFill>
             <a:schemeClr val="tx1"/>
           </a:solidFill>
@@ -3459,8 +3454,8 @@
           <a:cs typeface="+mn-cs"/>
         </a:defRPr>
       </a:lvl4pPr>
-      <a:lvl5pPr marL="2238817" algn="l" defTabSz="559704" rtl="0" eaLnBrk="1" latinLnBrk="0" hangingPunct="1">
-        <a:defRPr sz="2204" kern="1200">
+      <a:lvl5pPr marL="1828800" algn="l" defTabSz="457200" rtl="0" eaLnBrk="1" latinLnBrk="0" hangingPunct="1">
+        <a:defRPr sz="1800" kern="1200">
           <a:solidFill>
             <a:schemeClr val="tx1"/>
           </a:solidFill>
@@ -3469,8 +3464,8 @@
           <a:cs typeface="+mn-cs"/>
         </a:defRPr>
       </a:lvl5pPr>
-      <a:lvl6pPr marL="2798521" algn="l" defTabSz="559704" rtl="0" eaLnBrk="1" latinLnBrk="0" hangingPunct="1">
-        <a:defRPr sz="2204" kern="1200">
+      <a:lvl6pPr marL="2286000" algn="l" defTabSz="457200" rtl="0" eaLnBrk="1" latinLnBrk="0" hangingPunct="1">
+        <a:defRPr sz="1800" kern="1200">
           <a:solidFill>
             <a:schemeClr val="tx1"/>
           </a:solidFill>
@@ -3479,8 +3474,8 @@
           <a:cs typeface="+mn-cs"/>
         </a:defRPr>
       </a:lvl6pPr>
-      <a:lvl7pPr marL="3358225" algn="l" defTabSz="559704" rtl="0" eaLnBrk="1" latinLnBrk="0" hangingPunct="1">
-        <a:defRPr sz="2204" kern="1200">
+      <a:lvl7pPr marL="2743200" algn="l" defTabSz="457200" rtl="0" eaLnBrk="1" latinLnBrk="0" hangingPunct="1">
+        <a:defRPr sz="1800" kern="1200">
           <a:solidFill>
             <a:schemeClr val="tx1"/>
           </a:solidFill>
@@ -3489,8 +3484,8 @@
           <a:cs typeface="+mn-cs"/>
         </a:defRPr>
       </a:lvl7pPr>
-      <a:lvl8pPr marL="3917930" algn="l" defTabSz="559704" rtl="0" eaLnBrk="1" latinLnBrk="0" hangingPunct="1">
-        <a:defRPr sz="2204" kern="1200">
+      <a:lvl8pPr marL="3200400" algn="l" defTabSz="457200" rtl="0" eaLnBrk="1" latinLnBrk="0" hangingPunct="1">
+        <a:defRPr sz="1800" kern="1200">
           <a:solidFill>
             <a:schemeClr val="tx1"/>
           </a:solidFill>
@@ -3499,8 +3494,8 @@
           <a:cs typeface="+mn-cs"/>
         </a:defRPr>
       </a:lvl8pPr>
-      <a:lvl9pPr marL="4477634" algn="l" defTabSz="559704" rtl="0" eaLnBrk="1" latinLnBrk="0" hangingPunct="1">
-        <a:defRPr sz="2204" kern="1200">
+      <a:lvl9pPr marL="3657600" algn="l" defTabSz="457200" rtl="0" eaLnBrk="1" latinLnBrk="0" hangingPunct="1">
+        <a:defRPr sz="1800" kern="1200">
           <a:solidFill>
             <a:schemeClr val="tx1"/>
           </a:solidFill>
@@ -3533,14 +3528,1122 @@
       </p:grpSpPr>
       <p:sp>
         <p:nvSpPr>
+          <p:cNvPr id="8" name="fig3_ZZ">
+            <a:extLst>
+              <a:ext uri="{FF2B5EF4-FFF2-40B4-BE49-F238E27FC236}">
+                <a16:creationId xmlns:a16="http://schemas.microsoft.com/office/drawing/2014/main" id="{4DC81660-84CE-9F87-754B-2F2332A3B29B}"/>
+              </a:ext>
+            </a:extLst>
+          </p:cNvPr>
+          <p:cNvSpPr/>
+          <p:nvPr/>
+        </p:nvSpPr>
+        <p:spPr>
+          <a:xfrm>
+            <a:off x="-44130" y="2104914"/>
+            <a:ext cx="5869172" cy="1887276"/>
+          </a:xfrm>
+          <a:prstGeom prst="rect">
+            <a:avLst/>
+          </a:prstGeom>
+          <a:solidFill>
+            <a:schemeClr val="tx1"/>
+          </a:solidFill>
+          <a:ln>
+            <a:solidFill>
+              <a:schemeClr val="tx1"/>
+            </a:solidFill>
+          </a:ln>
+        </p:spPr>
+        <p:style>
+          <a:lnRef idx="1">
+            <a:schemeClr val="accent1"/>
+          </a:lnRef>
+          <a:fillRef idx="3">
+            <a:schemeClr val="accent1"/>
+          </a:fillRef>
+          <a:effectRef idx="2">
+            <a:schemeClr val="accent1"/>
+          </a:effectRef>
+          <a:fontRef idx="minor">
+            <a:schemeClr val="lt1"/>
+          </a:fontRef>
+        </p:style>
+        <p:txBody>
+          <a:bodyPr rtlCol="0" anchor="ctr"/>
+          <a:lstStyle/>
+          <a:p>
+            <a:pPr algn="ctr"/>
+            <a:endParaRPr lang="en-US"/>
+          </a:p>
+        </p:txBody>
+      </p:sp>
+      <p:sp>
+        <p:nvSpPr>
+          <p:cNvPr id="4" name="fig3_Z">
+            <a:extLst>
+              <a:ext uri="{FF2B5EF4-FFF2-40B4-BE49-F238E27FC236}">
+                <a16:creationId xmlns:a16="http://schemas.microsoft.com/office/drawing/2014/main" id="{887714A9-A995-E5C7-0A97-B52896DEE30B}"/>
+              </a:ext>
+            </a:extLst>
+          </p:cNvPr>
+          <p:cNvSpPr/>
+          <p:nvPr/>
+        </p:nvSpPr>
+        <p:spPr>
+          <a:xfrm>
+            <a:off x="-42530" y="-37213"/>
+            <a:ext cx="5869172" cy="2138618"/>
+          </a:xfrm>
+          <a:prstGeom prst="rect">
+            <a:avLst/>
+          </a:prstGeom>
+          <a:solidFill>
+            <a:schemeClr val="tx1">
+              <a:lumMod val="50000"/>
+              <a:lumOff val="50000"/>
+            </a:schemeClr>
+          </a:solidFill>
+          <a:ln>
+            <a:solidFill>
+              <a:schemeClr val="tx1">
+                <a:lumMod val="50000"/>
+                <a:lumOff val="50000"/>
+              </a:schemeClr>
+            </a:solidFill>
+          </a:ln>
+        </p:spPr>
+        <p:style>
+          <a:lnRef idx="1">
+            <a:schemeClr val="accent1"/>
+          </a:lnRef>
+          <a:fillRef idx="3">
+            <a:schemeClr val="accent1"/>
+          </a:fillRef>
+          <a:effectRef idx="2">
+            <a:schemeClr val="accent1"/>
+          </a:effectRef>
+          <a:fontRef idx="minor">
+            <a:schemeClr val="lt1"/>
+          </a:fontRef>
+        </p:style>
+        <p:txBody>
+          <a:bodyPr rtlCol="0" anchor="ctr"/>
+          <a:lstStyle/>
+          <a:p>
+            <a:pPr algn="ctr"/>
+            <a:endParaRPr lang="en-US"/>
+          </a:p>
+        </p:txBody>
+      </p:sp>
+      <p:sp>
+        <p:nvSpPr>
+          <p:cNvPr id="16" name="fig3_E">
+            <a:extLst>
+              <a:ext uri="{FF2B5EF4-FFF2-40B4-BE49-F238E27FC236}">
+                <a16:creationId xmlns:a16="http://schemas.microsoft.com/office/drawing/2014/main" id="{CA95EF0E-DF3A-1A8B-009B-6C4C8C120264}"/>
+              </a:ext>
+            </a:extLst>
+          </p:cNvPr>
+          <p:cNvSpPr/>
+          <p:nvPr/>
+        </p:nvSpPr>
+        <p:spPr>
+          <a:xfrm>
+            <a:off x="4628478" y="7982"/>
+            <a:ext cx="1116000" cy="1032929"/>
+          </a:xfrm>
+          <a:prstGeom prst="rect">
+            <a:avLst/>
+          </a:prstGeom>
+          <a:solidFill>
+            <a:srgbClr val="F5E8D0"/>
+          </a:solidFill>
+          <a:ln w="6350">
+            <a:solidFill>
+              <a:srgbClr val="808080"/>
+            </a:solidFill>
+          </a:ln>
+        </p:spPr>
+        <p:style>
+          <a:lnRef idx="1">
+            <a:schemeClr val="accent1"/>
+          </a:lnRef>
+          <a:fillRef idx="3">
+            <a:schemeClr val="accent1"/>
+          </a:fillRef>
+          <a:effectRef idx="2">
+            <a:schemeClr val="accent1"/>
+          </a:effectRef>
+          <a:fontRef idx="minor">
+            <a:schemeClr val="lt1"/>
+          </a:fontRef>
+        </p:style>
+        <p:txBody>
+          <a:bodyPr wrap="none" rtlCol="0" anchor="ctr"/>
+          <a:lstStyle/>
+          <a:p>
+            <a:pPr algn="ctr"/>
+            <a:r>
+              <a:rPr lang="en-US" sz="1000" b="1" dirty="0">
+                <a:solidFill>
+                  <a:srgbClr val="333333"/>
+                </a:solidFill>
+              </a:rPr>
+              <a:t>E</a:t>
+            </a:r>
+            <a:r>
+              <a:rPr sz="1000" b="1" dirty="0">
+                <a:solidFill>
+                  <a:srgbClr val="333333"/>
+                </a:solidFill>
+              </a:rPr>
+              <a:t>
+51×52 mm</a:t>
+            </a:r>
+          </a:p>
+        </p:txBody>
+      </p:sp>
+      <p:sp>
+        <p:nvSpPr>
+          <p:cNvPr id="18" name="fig3_F">
+            <a:extLst>
+              <a:ext uri="{FF2B5EF4-FFF2-40B4-BE49-F238E27FC236}">
+                <a16:creationId xmlns:a16="http://schemas.microsoft.com/office/drawing/2014/main" id="{4A3AC555-CC08-7C9F-5508-2473A4703C7C}"/>
+              </a:ext>
+            </a:extLst>
+          </p:cNvPr>
+          <p:cNvSpPr/>
+          <p:nvPr/>
+        </p:nvSpPr>
+        <p:spPr>
+          <a:xfrm>
+            <a:off x="7251" y="1075073"/>
+            <a:ext cx="1559896" cy="1026332"/>
+          </a:xfrm>
+          <a:prstGeom prst="rect">
+            <a:avLst/>
+          </a:prstGeom>
+          <a:solidFill>
+            <a:srgbClr val="F5E8D0"/>
+          </a:solidFill>
+          <a:ln w="6350">
+            <a:solidFill>
+              <a:srgbClr val="808080"/>
+            </a:solidFill>
+          </a:ln>
+        </p:spPr>
+        <p:style>
+          <a:lnRef idx="1">
+            <a:schemeClr val="accent1"/>
+          </a:lnRef>
+          <a:fillRef idx="3">
+            <a:schemeClr val="accent1"/>
+          </a:fillRef>
+          <a:effectRef idx="2">
+            <a:schemeClr val="accent1"/>
+          </a:effectRef>
+          <a:fontRef idx="minor">
+            <a:schemeClr val="lt1"/>
+          </a:fontRef>
+        </p:style>
+        <p:txBody>
+          <a:bodyPr wrap="none" rtlCol="0" anchor="ctr"/>
+          <a:lstStyle/>
+          <a:p>
+            <a:pPr algn="ctr"/>
+            <a:r>
+              <a:rPr lang="en-US" sz="1000" b="1" dirty="0">
+                <a:solidFill>
+                  <a:srgbClr val="333333"/>
+                </a:solidFill>
+              </a:rPr>
+              <a:t>F</a:t>
+            </a:r>
+            <a:r>
+              <a:rPr sz="1000" b="1" dirty="0">
+                <a:solidFill>
+                  <a:srgbClr val="333333"/>
+                </a:solidFill>
+              </a:rPr>
+              <a:t>
+51×52 mm</a:t>
+            </a:r>
+          </a:p>
+        </p:txBody>
+      </p:sp>
+      <p:sp>
+        <p:nvSpPr>
+          <p:cNvPr id="20" name="fig3_G">
+            <a:extLst>
+              <a:ext uri="{FF2B5EF4-FFF2-40B4-BE49-F238E27FC236}">
+                <a16:creationId xmlns:a16="http://schemas.microsoft.com/office/drawing/2014/main" id="{0CA36138-F1FC-0BC1-8EEB-DBBEE0088383}"/>
+              </a:ext>
+            </a:extLst>
+          </p:cNvPr>
+          <p:cNvSpPr/>
+          <p:nvPr/>
+        </p:nvSpPr>
+        <p:spPr>
+          <a:xfrm>
+            <a:off x="1620631" y="1075072"/>
+            <a:ext cx="1116000" cy="1029841"/>
+          </a:xfrm>
+          <a:prstGeom prst="rect">
+            <a:avLst/>
+          </a:prstGeom>
+          <a:solidFill>
+            <a:srgbClr val="F5E8D0"/>
+          </a:solidFill>
+          <a:ln w="6350">
+            <a:solidFill>
+              <a:srgbClr val="808080"/>
+            </a:solidFill>
+          </a:ln>
+        </p:spPr>
+        <p:style>
+          <a:lnRef idx="1">
+            <a:schemeClr val="accent1"/>
+          </a:lnRef>
+          <a:fillRef idx="3">
+            <a:schemeClr val="accent1"/>
+          </a:fillRef>
+          <a:effectRef idx="2">
+            <a:schemeClr val="accent1"/>
+          </a:effectRef>
+          <a:fontRef idx="minor">
+            <a:schemeClr val="lt1"/>
+          </a:fontRef>
+        </p:style>
+        <p:txBody>
+          <a:bodyPr wrap="none" rtlCol="0" anchor="ctr"/>
+          <a:lstStyle/>
+          <a:p>
+            <a:pPr algn="ctr"/>
+            <a:r>
+              <a:rPr lang="en-US" sz="1000" b="1" dirty="0">
+                <a:solidFill>
+                  <a:srgbClr val="333333"/>
+                </a:solidFill>
+              </a:rPr>
+              <a:t>G</a:t>
+            </a:r>
+            <a:r>
+              <a:rPr sz="1000" b="1" dirty="0">
+                <a:solidFill>
+                  <a:srgbClr val="333333"/>
+                </a:solidFill>
+              </a:rPr>
+              <a:t>
+51×52 mm</a:t>
+            </a:r>
+          </a:p>
+        </p:txBody>
+      </p:sp>
+      <p:sp>
+        <p:nvSpPr>
+          <p:cNvPr id="22" name="fig3_H">
+            <a:extLst>
+              <a:ext uri="{FF2B5EF4-FFF2-40B4-BE49-F238E27FC236}">
+                <a16:creationId xmlns:a16="http://schemas.microsoft.com/office/drawing/2014/main" id="{112CC553-7965-2DB1-9C5A-02B00F3F9A86}"/>
+              </a:ext>
+            </a:extLst>
+          </p:cNvPr>
+          <p:cNvSpPr/>
+          <p:nvPr/>
+        </p:nvSpPr>
+        <p:spPr>
+          <a:xfrm>
+            <a:off x="2809261" y="1069643"/>
+            <a:ext cx="1559896" cy="1035271"/>
+          </a:xfrm>
+          <a:prstGeom prst="rect">
+            <a:avLst/>
+          </a:prstGeom>
+          <a:solidFill>
+            <a:srgbClr val="F5E8D0"/>
+          </a:solidFill>
+          <a:ln w="6350">
+            <a:solidFill>
+              <a:srgbClr val="808080"/>
+            </a:solidFill>
+          </a:ln>
+        </p:spPr>
+        <p:style>
+          <a:lnRef idx="1">
+            <a:schemeClr val="accent1"/>
+          </a:lnRef>
+          <a:fillRef idx="3">
+            <a:schemeClr val="accent1"/>
+          </a:fillRef>
+          <a:effectRef idx="2">
+            <a:schemeClr val="accent1"/>
+          </a:effectRef>
+          <a:fontRef idx="minor">
+            <a:schemeClr val="lt1"/>
+          </a:fontRef>
+        </p:style>
+        <p:txBody>
+          <a:bodyPr wrap="none" rtlCol="0" anchor="ctr"/>
+          <a:lstStyle/>
+          <a:p>
+            <a:pPr algn="ctr"/>
+            <a:r>
+              <a:rPr lang="en-US" sz="1000" b="1" dirty="0">
+                <a:solidFill>
+                  <a:srgbClr val="333333"/>
+                </a:solidFill>
+              </a:rPr>
+              <a:t>H</a:t>
+            </a:r>
+            <a:r>
+              <a:rPr sz="1000" b="1" dirty="0">
+                <a:solidFill>
+                  <a:srgbClr val="333333"/>
+                </a:solidFill>
+              </a:rPr>
+              <a:t>
+51×52 mm</a:t>
+            </a:r>
+          </a:p>
+        </p:txBody>
+      </p:sp>
+      <p:sp>
+        <p:nvSpPr>
+          <p:cNvPr id="24" name="fig3_I">
+            <a:extLst>
+              <a:ext uri="{FF2B5EF4-FFF2-40B4-BE49-F238E27FC236}">
+                <a16:creationId xmlns:a16="http://schemas.microsoft.com/office/drawing/2014/main" id="{33FA2E5E-893D-E5AB-7CD8-9A095BA4F5B9}"/>
+              </a:ext>
+            </a:extLst>
+          </p:cNvPr>
+          <p:cNvSpPr/>
+          <p:nvPr/>
+        </p:nvSpPr>
+        <p:spPr>
+          <a:xfrm>
+            <a:off x="4619147" y="1071985"/>
+            <a:ext cx="1116000" cy="1032929"/>
+          </a:xfrm>
+          <a:prstGeom prst="rect">
+            <a:avLst/>
+          </a:prstGeom>
+          <a:solidFill>
+            <a:srgbClr val="F5E8D0"/>
+          </a:solidFill>
+          <a:ln w="6350">
+            <a:solidFill>
+              <a:srgbClr val="808080"/>
+            </a:solidFill>
+          </a:ln>
+        </p:spPr>
+        <p:style>
+          <a:lnRef idx="1">
+            <a:schemeClr val="accent1"/>
+          </a:lnRef>
+          <a:fillRef idx="3">
+            <a:schemeClr val="accent1"/>
+          </a:fillRef>
+          <a:effectRef idx="2">
+            <a:schemeClr val="accent1"/>
+          </a:effectRef>
+          <a:fontRef idx="minor">
+            <a:schemeClr val="lt1"/>
+          </a:fontRef>
+        </p:style>
+        <p:txBody>
+          <a:bodyPr wrap="none" rtlCol="0" anchor="ctr"/>
+          <a:lstStyle/>
+          <a:p>
+            <a:pPr algn="ctr"/>
+            <a:r>
+              <a:rPr lang="en-US" sz="1000" b="1" dirty="0">
+                <a:solidFill>
+                  <a:srgbClr val="333333"/>
+                </a:solidFill>
+              </a:rPr>
+              <a:t>I</a:t>
+            </a:r>
+            <a:r>
+              <a:rPr sz="1000" b="1" dirty="0">
+                <a:solidFill>
+                  <a:srgbClr val="333333"/>
+                </a:solidFill>
+              </a:rPr>
+              <a:t>
+51×52 mm</a:t>
+            </a:r>
+          </a:p>
+        </p:txBody>
+      </p:sp>
+      <p:sp>
+        <p:nvSpPr>
+          <p:cNvPr id="26" name="fig3_J">
+            <a:extLst>
+              <a:ext uri="{FF2B5EF4-FFF2-40B4-BE49-F238E27FC236}">
+                <a16:creationId xmlns:a16="http://schemas.microsoft.com/office/drawing/2014/main" id="{91F3CB8E-0647-5B0A-623B-BAA61F0E536E}"/>
+              </a:ext>
+            </a:extLst>
+          </p:cNvPr>
+          <p:cNvSpPr/>
+          <p:nvPr/>
+        </p:nvSpPr>
+        <p:spPr>
+          <a:xfrm>
+            <a:off x="-1600" y="2161146"/>
+            <a:ext cx="1116000" cy="1080764"/>
+          </a:xfrm>
+          <a:prstGeom prst="rect">
+            <a:avLst/>
+          </a:prstGeom>
+          <a:solidFill>
+            <a:srgbClr val="F5E8D0"/>
+          </a:solidFill>
+          <a:ln w="6350">
+            <a:solidFill>
+              <a:srgbClr val="808080"/>
+            </a:solidFill>
+          </a:ln>
+        </p:spPr>
+        <p:style>
+          <a:lnRef idx="1">
+            <a:schemeClr val="accent1"/>
+          </a:lnRef>
+          <a:fillRef idx="3">
+            <a:schemeClr val="accent1"/>
+          </a:fillRef>
+          <a:effectRef idx="2">
+            <a:schemeClr val="accent1"/>
+          </a:effectRef>
+          <a:fontRef idx="minor">
+            <a:schemeClr val="lt1"/>
+          </a:fontRef>
+        </p:style>
+        <p:txBody>
+          <a:bodyPr wrap="none" rtlCol="0" anchor="ctr"/>
+          <a:lstStyle/>
+          <a:p>
+            <a:pPr algn="ctr"/>
+            <a:r>
+              <a:rPr lang="en-US" sz="1000" b="1" dirty="0">
+                <a:solidFill>
+                  <a:srgbClr val="333333"/>
+                </a:solidFill>
+              </a:rPr>
+              <a:t>J</a:t>
+            </a:r>
+            <a:r>
+              <a:rPr sz="1000" b="1" dirty="0">
+                <a:solidFill>
+                  <a:srgbClr val="333333"/>
+                </a:solidFill>
+              </a:rPr>
+              <a:t>
+51×52 mm</a:t>
+            </a:r>
+          </a:p>
+        </p:txBody>
+      </p:sp>
+      <p:sp>
+        <p:nvSpPr>
+          <p:cNvPr id="28" name="fig3_K">
+            <a:extLst>
+              <a:ext uri="{FF2B5EF4-FFF2-40B4-BE49-F238E27FC236}">
+                <a16:creationId xmlns:a16="http://schemas.microsoft.com/office/drawing/2014/main" id="{D7826737-5DF9-A565-B6D9-D613D4EDECCE}"/>
+              </a:ext>
+            </a:extLst>
+          </p:cNvPr>
+          <p:cNvSpPr/>
+          <p:nvPr/>
+        </p:nvSpPr>
+        <p:spPr>
+          <a:xfrm>
+            <a:off x="1187031" y="2166227"/>
+            <a:ext cx="1548000" cy="994321"/>
+          </a:xfrm>
+          <a:prstGeom prst="rect">
+            <a:avLst/>
+          </a:prstGeom>
+          <a:solidFill>
+            <a:srgbClr val="F5E8D0"/>
+          </a:solidFill>
+          <a:ln w="6350">
+            <a:solidFill>
+              <a:srgbClr val="808080"/>
+            </a:solidFill>
+          </a:ln>
+        </p:spPr>
+        <p:style>
+          <a:lnRef idx="1">
+            <a:schemeClr val="accent1"/>
+          </a:lnRef>
+          <a:fillRef idx="3">
+            <a:schemeClr val="accent1"/>
+          </a:fillRef>
+          <a:effectRef idx="2">
+            <a:schemeClr val="accent1"/>
+          </a:effectRef>
+          <a:fontRef idx="minor">
+            <a:schemeClr val="lt1"/>
+          </a:fontRef>
+        </p:style>
+        <p:txBody>
+          <a:bodyPr wrap="none" rtlCol="0" anchor="ctr"/>
+          <a:lstStyle/>
+          <a:p>
+            <a:pPr algn="ctr"/>
+            <a:r>
+              <a:rPr lang="en-US" sz="1000" b="1" dirty="0">
+                <a:solidFill>
+                  <a:srgbClr val="333333"/>
+                </a:solidFill>
+              </a:rPr>
+              <a:t>K</a:t>
+            </a:r>
+            <a:r>
+              <a:rPr sz="1000" b="1" dirty="0">
+                <a:solidFill>
+                  <a:srgbClr val="333333"/>
+                </a:solidFill>
+              </a:rPr>
+              <a:t>
+51×52 mm</a:t>
+            </a:r>
+          </a:p>
+        </p:txBody>
+      </p:sp>
+      <p:sp>
+        <p:nvSpPr>
+          <p:cNvPr id="30" name="fig3_P">
+            <a:extLst>
+              <a:ext uri="{FF2B5EF4-FFF2-40B4-BE49-F238E27FC236}">
+                <a16:creationId xmlns:a16="http://schemas.microsoft.com/office/drawing/2014/main" id="{4B9BEAF1-E32B-18AC-71C5-7973920C7D76}"/>
+              </a:ext>
+            </a:extLst>
+          </p:cNvPr>
+          <p:cNvSpPr/>
+          <p:nvPr/>
+        </p:nvSpPr>
+        <p:spPr>
+          <a:xfrm>
+            <a:off x="1620630" y="3168915"/>
+            <a:ext cx="1116000" cy="823274"/>
+          </a:xfrm>
+          <a:prstGeom prst="rect">
+            <a:avLst/>
+          </a:prstGeom>
+          <a:solidFill>
+            <a:srgbClr val="F5E8D0"/>
+          </a:solidFill>
+          <a:ln w="6350">
+            <a:solidFill>
+              <a:srgbClr val="808080"/>
+            </a:solidFill>
+          </a:ln>
+        </p:spPr>
+        <p:style>
+          <a:lnRef idx="1">
+            <a:schemeClr val="accent1"/>
+          </a:lnRef>
+          <a:fillRef idx="3">
+            <a:schemeClr val="accent1"/>
+          </a:fillRef>
+          <a:effectRef idx="2">
+            <a:schemeClr val="accent1"/>
+          </a:effectRef>
+          <a:fontRef idx="minor">
+            <a:schemeClr val="lt1"/>
+          </a:fontRef>
+        </p:style>
+        <p:txBody>
+          <a:bodyPr wrap="none" rtlCol="0" anchor="ctr"/>
+          <a:lstStyle/>
+          <a:p>
+            <a:pPr algn="ctr"/>
+            <a:r>
+              <a:rPr lang="en-US" sz="1000" b="1" dirty="0">
+                <a:solidFill>
+                  <a:srgbClr val="333333"/>
+                </a:solidFill>
+              </a:rPr>
+              <a:t>P
+</a:t>
+            </a:r>
+            <a:r>
+              <a:rPr sz="1000" b="1" dirty="0">
+                <a:solidFill>
+                  <a:srgbClr val="333333"/>
+                </a:solidFill>
+              </a:rPr>
+              <a:t>51×52 mm</a:t>
+            </a:r>
+          </a:p>
+        </p:txBody>
+      </p:sp>
+      <p:sp>
+        <p:nvSpPr>
+          <p:cNvPr id="32" name="fig3_L">
+            <a:extLst>
+              <a:ext uri="{FF2B5EF4-FFF2-40B4-BE49-F238E27FC236}">
+                <a16:creationId xmlns:a16="http://schemas.microsoft.com/office/drawing/2014/main" id="{4697FDE0-95F9-683B-0261-CD3656EB6C5F}"/>
+              </a:ext>
+            </a:extLst>
+          </p:cNvPr>
+          <p:cNvSpPr/>
+          <p:nvPr/>
+        </p:nvSpPr>
+        <p:spPr>
+          <a:xfrm>
+            <a:off x="2807662" y="2166227"/>
+            <a:ext cx="576000" cy="994321"/>
+          </a:xfrm>
+          <a:prstGeom prst="rect">
+            <a:avLst/>
+          </a:prstGeom>
+          <a:solidFill>
+            <a:srgbClr val="F5E8D0"/>
+          </a:solidFill>
+          <a:ln w="6350">
+            <a:solidFill>
+              <a:srgbClr val="808080"/>
+            </a:solidFill>
+          </a:ln>
+        </p:spPr>
+        <p:style>
+          <a:lnRef idx="1">
+            <a:schemeClr val="accent1"/>
+          </a:lnRef>
+          <a:fillRef idx="3">
+            <a:schemeClr val="accent1"/>
+          </a:fillRef>
+          <a:effectRef idx="2">
+            <a:schemeClr val="accent1"/>
+          </a:effectRef>
+          <a:fontRef idx="minor">
+            <a:schemeClr val="lt1"/>
+          </a:fontRef>
+        </p:style>
+        <p:txBody>
+          <a:bodyPr wrap="none" rtlCol="0" anchor="ctr"/>
+          <a:lstStyle/>
+          <a:p>
+            <a:pPr algn="ctr"/>
+            <a:r>
+              <a:rPr lang="en-US" sz="1000" b="1" dirty="0">
+                <a:solidFill>
+                  <a:srgbClr val="333333"/>
+                </a:solidFill>
+              </a:rPr>
+              <a:t>L</a:t>
+            </a:r>
+            <a:r>
+              <a:rPr sz="1000" b="1" dirty="0">
+                <a:solidFill>
+                  <a:srgbClr val="333333"/>
+                </a:solidFill>
+              </a:rPr>
+              <a:t>
+51×52 mm</a:t>
+            </a:r>
+          </a:p>
+        </p:txBody>
+      </p:sp>
+      <p:sp>
+        <p:nvSpPr>
+          <p:cNvPr id="34" name="fig3_M">
+            <a:extLst>
+              <a:ext uri="{FF2B5EF4-FFF2-40B4-BE49-F238E27FC236}">
+                <a16:creationId xmlns:a16="http://schemas.microsoft.com/office/drawing/2014/main" id="{2DC4DE53-0BDF-CD07-C7F9-5FA97F0CDF3D}"/>
+              </a:ext>
+            </a:extLst>
+          </p:cNvPr>
+          <p:cNvSpPr/>
+          <p:nvPr/>
+        </p:nvSpPr>
+        <p:spPr>
+          <a:xfrm>
+            <a:off x="3443646" y="2171489"/>
+            <a:ext cx="1116000" cy="997428"/>
+          </a:xfrm>
+          <a:prstGeom prst="rect">
+            <a:avLst/>
+          </a:prstGeom>
+          <a:solidFill>
+            <a:srgbClr val="F5E8D0"/>
+          </a:solidFill>
+          <a:ln w="6350">
+            <a:solidFill>
+              <a:srgbClr val="808080"/>
+            </a:solidFill>
+          </a:ln>
+        </p:spPr>
+        <p:style>
+          <a:lnRef idx="1">
+            <a:schemeClr val="accent1"/>
+          </a:lnRef>
+          <a:fillRef idx="3">
+            <a:schemeClr val="accent1"/>
+          </a:fillRef>
+          <a:effectRef idx="2">
+            <a:schemeClr val="accent1"/>
+          </a:effectRef>
+          <a:fontRef idx="minor">
+            <a:schemeClr val="lt1"/>
+          </a:fontRef>
+        </p:style>
+        <p:txBody>
+          <a:bodyPr wrap="none" rtlCol="0" anchor="ctr"/>
+          <a:lstStyle/>
+          <a:p>
+            <a:pPr algn="ctr"/>
+            <a:r>
+              <a:rPr lang="en-US" sz="1000" b="1" dirty="0">
+                <a:solidFill>
+                  <a:srgbClr val="333333"/>
+                </a:solidFill>
+              </a:rPr>
+              <a:t>M</a:t>
+            </a:r>
+            <a:r>
+              <a:rPr sz="1000" b="1" dirty="0">
+                <a:solidFill>
+                  <a:srgbClr val="333333"/>
+                </a:solidFill>
+              </a:rPr>
+              <a:t>
+51×52 mm</a:t>
+            </a:r>
+          </a:p>
+        </p:txBody>
+      </p:sp>
+      <p:sp>
+        <p:nvSpPr>
+          <p:cNvPr id="36" name="fig3_N">
+            <a:extLst>
+              <a:ext uri="{FF2B5EF4-FFF2-40B4-BE49-F238E27FC236}">
+                <a16:creationId xmlns:a16="http://schemas.microsoft.com/office/drawing/2014/main" id="{0F09EC13-CEF1-2761-6318-FDF663E79161}"/>
+              </a:ext>
+            </a:extLst>
+          </p:cNvPr>
+          <p:cNvSpPr/>
+          <p:nvPr/>
+        </p:nvSpPr>
+        <p:spPr>
+          <a:xfrm>
+            <a:off x="4628478" y="2166227"/>
+            <a:ext cx="1116000" cy="1002690"/>
+          </a:xfrm>
+          <a:prstGeom prst="rect">
+            <a:avLst/>
+          </a:prstGeom>
+          <a:solidFill>
+            <a:srgbClr val="F5E8D0"/>
+          </a:solidFill>
+          <a:ln w="6350">
+            <a:solidFill>
+              <a:srgbClr val="808080"/>
+            </a:solidFill>
+          </a:ln>
+        </p:spPr>
+        <p:style>
+          <a:lnRef idx="1">
+            <a:schemeClr val="accent1"/>
+          </a:lnRef>
+          <a:fillRef idx="3">
+            <a:schemeClr val="accent1"/>
+          </a:fillRef>
+          <a:effectRef idx="2">
+            <a:schemeClr val="accent1"/>
+          </a:effectRef>
+          <a:fontRef idx="minor">
+            <a:schemeClr val="lt1"/>
+          </a:fontRef>
+        </p:style>
+        <p:txBody>
+          <a:bodyPr wrap="none" rtlCol="0" anchor="ctr"/>
+          <a:lstStyle/>
+          <a:p>
+            <a:pPr algn="ctr"/>
+            <a:r>
+              <a:rPr lang="en-US" sz="1000" b="1" dirty="0">
+                <a:solidFill>
+                  <a:srgbClr val="333333"/>
+                </a:solidFill>
+              </a:rPr>
+              <a:t>N</a:t>
+            </a:r>
+            <a:r>
+              <a:rPr sz="1000" b="1" dirty="0">
+                <a:solidFill>
+                  <a:srgbClr val="333333"/>
+                </a:solidFill>
+              </a:rPr>
+              <a:t>
+51×52 mm</a:t>
+            </a:r>
+          </a:p>
+        </p:txBody>
+      </p:sp>
+      <p:sp>
+        <p:nvSpPr>
+          <p:cNvPr id="38" name="fig3_O">
+            <a:extLst>
+              <a:ext uri="{FF2B5EF4-FFF2-40B4-BE49-F238E27FC236}">
+                <a16:creationId xmlns:a16="http://schemas.microsoft.com/office/drawing/2014/main" id="{E73FA2B4-191E-3521-7B6F-6569D721D403}"/>
+              </a:ext>
+            </a:extLst>
+          </p:cNvPr>
+          <p:cNvSpPr/>
+          <p:nvPr/>
+        </p:nvSpPr>
+        <p:spPr>
+          <a:xfrm>
+            <a:off x="-3200" y="3183037"/>
+            <a:ext cx="1548000" cy="809152"/>
+          </a:xfrm>
+          <a:prstGeom prst="rect">
+            <a:avLst/>
+          </a:prstGeom>
+          <a:solidFill>
+            <a:srgbClr val="F5E8D0"/>
+          </a:solidFill>
+          <a:ln w="6350">
+            <a:solidFill>
+              <a:srgbClr val="808080"/>
+            </a:solidFill>
+          </a:ln>
+        </p:spPr>
+        <p:style>
+          <a:lnRef idx="1">
+            <a:schemeClr val="accent1"/>
+          </a:lnRef>
+          <a:fillRef idx="3">
+            <a:schemeClr val="accent1"/>
+          </a:fillRef>
+          <a:effectRef idx="2">
+            <a:schemeClr val="accent1"/>
+          </a:effectRef>
+          <a:fontRef idx="minor">
+            <a:schemeClr val="lt1"/>
+          </a:fontRef>
+        </p:style>
+        <p:txBody>
+          <a:bodyPr wrap="none" rtlCol="0" anchor="ctr"/>
+          <a:lstStyle/>
+          <a:p>
+            <a:pPr algn="ctr"/>
+            <a:r>
+              <a:rPr lang="en-US" sz="1000" b="1" dirty="0">
+                <a:solidFill>
+                  <a:srgbClr val="333333"/>
+                </a:solidFill>
+              </a:rPr>
+              <a:t>O
+</a:t>
+            </a:r>
+            <a:r>
+              <a:rPr sz="1000" b="1" dirty="0">
+                <a:solidFill>
+                  <a:srgbClr val="333333"/>
+                </a:solidFill>
+              </a:rPr>
+              <a:t>51×52 mm</a:t>
+            </a:r>
+          </a:p>
+        </p:txBody>
+      </p:sp>
+      <p:sp>
+        <p:nvSpPr>
+          <p:cNvPr id="14" name="fig3_D">
+            <a:extLst>
+              <a:ext uri="{FF2B5EF4-FFF2-40B4-BE49-F238E27FC236}">
+                <a16:creationId xmlns:a16="http://schemas.microsoft.com/office/drawing/2014/main" id="{79992732-9DF7-35AE-2F1C-B7DDCF062859}"/>
+              </a:ext>
+            </a:extLst>
+          </p:cNvPr>
+          <p:cNvSpPr/>
+          <p:nvPr/>
+        </p:nvSpPr>
+        <p:spPr>
+          <a:xfrm>
+            <a:off x="3451743" y="7982"/>
+            <a:ext cx="1116000" cy="1037788"/>
+          </a:xfrm>
+          <a:prstGeom prst="rect">
+            <a:avLst/>
+          </a:prstGeom>
+          <a:solidFill>
+            <a:srgbClr val="F5E8D0"/>
+          </a:solidFill>
+          <a:ln w="6350">
+            <a:solidFill>
+              <a:srgbClr val="808080"/>
+            </a:solidFill>
+          </a:ln>
+        </p:spPr>
+        <p:style>
+          <a:lnRef idx="1">
+            <a:schemeClr val="accent1"/>
+          </a:lnRef>
+          <a:fillRef idx="3">
+            <a:schemeClr val="accent1"/>
+          </a:fillRef>
+          <a:effectRef idx="2">
+            <a:schemeClr val="accent1"/>
+          </a:effectRef>
+          <a:fontRef idx="minor">
+            <a:schemeClr val="lt1"/>
+          </a:fontRef>
+        </p:style>
+        <p:txBody>
+          <a:bodyPr wrap="none" rtlCol="0" anchor="ctr"/>
+          <a:lstStyle/>
+          <a:p>
+            <a:pPr algn="ctr"/>
+            <a:r>
+              <a:rPr lang="en-US" sz="1000" b="1" dirty="0">
+                <a:solidFill>
+                  <a:srgbClr val="333333"/>
+                </a:solidFill>
+              </a:rPr>
+              <a:t>D</a:t>
+            </a:r>
+            <a:r>
+              <a:rPr sz="1000" b="1" dirty="0">
+                <a:solidFill>
+                  <a:srgbClr val="333333"/>
+                </a:solidFill>
+              </a:rPr>
+              <a:t>
+51×52 mm</a:t>
+            </a:r>
+          </a:p>
+        </p:txBody>
+      </p:sp>
+      <p:sp>
+        <p:nvSpPr>
+          <p:cNvPr id="12" name="fig3_C">
+            <a:extLst>
+              <a:ext uri="{FF2B5EF4-FFF2-40B4-BE49-F238E27FC236}">
+                <a16:creationId xmlns:a16="http://schemas.microsoft.com/office/drawing/2014/main" id="{CAA566B7-B833-6B71-2A3B-8EA11E44DBF6}"/>
+              </a:ext>
+            </a:extLst>
+          </p:cNvPr>
+          <p:cNvSpPr/>
+          <p:nvPr/>
+        </p:nvSpPr>
+        <p:spPr>
+          <a:xfrm>
+            <a:off x="2809262" y="3123"/>
+            <a:ext cx="576000" cy="1037788"/>
+          </a:xfrm>
+          <a:prstGeom prst="rect">
+            <a:avLst/>
+          </a:prstGeom>
+          <a:solidFill>
+            <a:srgbClr val="F5E8D0"/>
+          </a:solidFill>
+          <a:ln w="6350">
+            <a:solidFill>
+              <a:srgbClr val="808080"/>
+            </a:solidFill>
+          </a:ln>
+        </p:spPr>
+        <p:style>
+          <a:lnRef idx="1">
+            <a:schemeClr val="accent1"/>
+          </a:lnRef>
+          <a:fillRef idx="3">
+            <a:schemeClr val="accent1"/>
+          </a:fillRef>
+          <a:effectRef idx="2">
+            <a:schemeClr val="accent1"/>
+          </a:effectRef>
+          <a:fontRef idx="minor">
+            <a:schemeClr val="lt1"/>
+          </a:fontRef>
+        </p:style>
+        <p:txBody>
+          <a:bodyPr wrap="none" rtlCol="0" anchor="ctr"/>
+          <a:lstStyle/>
+          <a:p>
+            <a:pPr algn="ctr"/>
+            <a:r>
+              <a:rPr sz="1000" b="1" dirty="0">
+                <a:solidFill>
+                  <a:srgbClr val="333333"/>
+                </a:solidFill>
+              </a:rPr>
+              <a:t>C
+51×52 mm</a:t>
+            </a:r>
+          </a:p>
+        </p:txBody>
+      </p:sp>
+      <p:sp>
+        <p:nvSpPr>
+          <p:cNvPr id="3" name="fig3_B"/>
+          <p:cNvSpPr/>
+          <p:nvPr/>
+        </p:nvSpPr>
+        <p:spPr>
+          <a:xfrm>
+            <a:off x="1176735" y="0"/>
+            <a:ext cx="1559896" cy="1040911"/>
+          </a:xfrm>
+          <a:prstGeom prst="rect">
+            <a:avLst/>
+          </a:prstGeom>
+          <a:solidFill>
+            <a:srgbClr val="D0F0E0"/>
+          </a:solidFill>
+          <a:ln w="6350">
+            <a:solidFill>
+              <a:srgbClr val="808080"/>
+            </a:solidFill>
+          </a:ln>
+        </p:spPr>
+        <p:style>
+          <a:lnRef idx="1">
+            <a:schemeClr val="accent1"/>
+          </a:lnRef>
+          <a:fillRef idx="3">
+            <a:schemeClr val="accent1"/>
+          </a:fillRef>
+          <a:effectRef idx="2">
+            <a:schemeClr val="accent1"/>
+          </a:effectRef>
+          <a:fontRef idx="minor">
+            <a:schemeClr val="lt1"/>
+          </a:fontRef>
+        </p:style>
+        <p:txBody>
+          <a:bodyPr wrap="none" rtlCol="0" anchor="ctr"/>
+          <a:lstStyle/>
+          <a:p>
+            <a:pPr algn="ctr"/>
+            <a:r>
+              <a:rPr sz="1000" b="1" dirty="0">
+                <a:solidFill>
+                  <a:srgbClr val="333333"/>
+                </a:solidFill>
+              </a:rPr>
+              <a:t>B
+52×52 mm</a:t>
+            </a:r>
+          </a:p>
+        </p:txBody>
+      </p:sp>
+      <p:sp>
+        <p:nvSpPr>
           <p:cNvPr id="2" name="fig3_A"/>
           <p:cNvSpPr/>
           <p:nvPr/>
         </p:nvSpPr>
         <p:spPr>
           <a:xfrm>
-            <a:off x="139848" y="-912086"/>
-            <a:ext cx="6992636" cy="3081695"/>
+            <a:off x="0" y="0"/>
+            <a:ext cx="1116000" cy="1040911"/>
           </a:xfrm>
           <a:prstGeom prst="rect">
             <a:avLst/>
@@ -3574,13 +4677,149 @@
           <a:p>
             <a:pPr algn="ctr"/>
             <a:r>
-              <a:rPr sz="1224" b="1" dirty="0">
+              <a:rPr sz="1000" b="1" dirty="0">
                 <a:solidFill>
                   <a:srgbClr val="333333"/>
                 </a:solidFill>
               </a:rPr>
               <a:t>A
 52×52 mm</a:t>
+            </a:r>
+          </a:p>
+        </p:txBody>
+      </p:sp>
+      <p:sp>
+        <p:nvSpPr>
+          <p:cNvPr id="5" name="fig3_Q">
+            <a:extLst>
+              <a:ext uri="{FF2B5EF4-FFF2-40B4-BE49-F238E27FC236}">
+                <a16:creationId xmlns:a16="http://schemas.microsoft.com/office/drawing/2014/main" id="{6282A2EC-B6E0-9DEB-A898-7D27C466D0B7}"/>
+              </a:ext>
+            </a:extLst>
+          </p:cNvPr>
+          <p:cNvSpPr/>
+          <p:nvPr/>
+        </p:nvSpPr>
+        <p:spPr>
+          <a:xfrm>
+            <a:off x="2815209" y="3175976"/>
+            <a:ext cx="1548000" cy="809152"/>
+          </a:xfrm>
+          <a:prstGeom prst="rect">
+            <a:avLst/>
+          </a:prstGeom>
+          <a:solidFill>
+            <a:srgbClr val="F5E8D0"/>
+          </a:solidFill>
+          <a:ln w="6350">
+            <a:solidFill>
+              <a:srgbClr val="808080"/>
+            </a:solidFill>
+          </a:ln>
+        </p:spPr>
+        <p:style>
+          <a:lnRef idx="1">
+            <a:schemeClr val="accent1"/>
+          </a:lnRef>
+          <a:fillRef idx="3">
+            <a:schemeClr val="accent1"/>
+          </a:fillRef>
+          <a:effectRef idx="2">
+            <a:schemeClr val="accent1"/>
+          </a:effectRef>
+          <a:fontRef idx="minor">
+            <a:schemeClr val="lt1"/>
+          </a:fontRef>
+        </p:style>
+        <p:txBody>
+          <a:bodyPr wrap="none" rtlCol="0" anchor="ctr"/>
+          <a:lstStyle/>
+          <a:p>
+            <a:pPr algn="ctr"/>
+            <a:r>
+              <a:rPr lang="en-US" sz="1000" b="1" dirty="0">
+                <a:solidFill>
+                  <a:srgbClr val="333333"/>
+                </a:solidFill>
+              </a:rPr>
+              <a:t>Q</a:t>
+            </a:r>
+            <a:r>
+              <a:rPr sz="1000" b="1" dirty="0">
+                <a:solidFill>
+                  <a:srgbClr val="333333"/>
+                </a:solidFill>
+              </a:rPr>
+              <a:t>
+51×52 mm</a:t>
+            </a:r>
+          </a:p>
+        </p:txBody>
+      </p:sp>
+      <p:sp>
+        <p:nvSpPr>
+          <p:cNvPr id="7" name="fig3_R">
+            <a:extLst>
+              <a:ext uri="{FF2B5EF4-FFF2-40B4-BE49-F238E27FC236}">
+                <a16:creationId xmlns:a16="http://schemas.microsoft.com/office/drawing/2014/main" id="{CC47702C-B2D9-29E2-3969-B426BF1240A8}"/>
+              </a:ext>
+            </a:extLst>
+          </p:cNvPr>
+          <p:cNvSpPr/>
+          <p:nvPr/>
+        </p:nvSpPr>
+        <p:spPr>
+          <a:xfrm>
+            <a:off x="4628478" y="3167899"/>
+            <a:ext cx="1116000" cy="824290"/>
+          </a:xfrm>
+          <a:prstGeom prst="rect">
+            <a:avLst/>
+          </a:prstGeom>
+          <a:solidFill>
+            <a:srgbClr val="F5E8D0"/>
+          </a:solidFill>
+          <a:ln w="6350">
+            <a:solidFill>
+              <a:srgbClr val="808080"/>
+            </a:solidFill>
+          </a:ln>
+        </p:spPr>
+        <p:style>
+          <a:lnRef idx="1">
+            <a:schemeClr val="accent1"/>
+          </a:lnRef>
+          <a:fillRef idx="3">
+            <a:schemeClr val="accent1"/>
+          </a:fillRef>
+          <a:effectRef idx="2">
+            <a:schemeClr val="accent1"/>
+          </a:effectRef>
+          <a:fontRef idx="minor">
+            <a:schemeClr val="lt1"/>
+          </a:fontRef>
+        </p:style>
+        <p:txBody>
+          <a:bodyPr wrap="none" rtlCol="0" anchor="ctr"/>
+          <a:lstStyle/>
+          <a:p>
+            <a:pPr algn="ctr"/>
+            <a:r>
+              <a:rPr lang="en-US" sz="1000" b="1" dirty="0">
+                <a:solidFill>
+                  <a:srgbClr val="333333"/>
+                </a:solidFill>
+              </a:rPr>
+              <a:t>R</a:t>
+            </a:r>
+            <a:r>
+              <a:rPr sz="1000" b="1" dirty="0">
+                <a:solidFill>
+                  <a:srgbClr val="333333"/>
+                </a:solidFill>
+              </a:rPr>
+              <a:t>
+51×52 mm</a:t>
             </a:r>
           </a:p>
         </p:txBody>
